--- a/slides/CSC336-Lecture-26-Introduction-to-React.pptx
+++ b/slides/CSC336-Lecture-26-Introduction-to-React.pptx
@@ -3459,79 +3459,44 @@
       </p:sp>
       <p:sp>
         <p:nvSpPr>
-          <p:cNvPr id="6" name="Text 4"/>
-          <p:cNvSpPr txBox="1"/>
-          <p:nvPr/>
-        </p:nvSpPr>
-        <p:spPr>
-          <a:xfrm>
-            <a:off x="640080" y="6446520"/>
-            <a:ext cx="8686800" cy="292608"/>
-          </a:xfrm>
-          <a:prstGeom prst="rect">
-            <a:avLst/>
-          </a:prstGeom>
-          <a:noFill/>
-          <a:ln/>
-        </p:spPr>
-        <p:txBody>
-          <a:bodyPr wrap="square" lIns="0" tIns="0" rIns="0" bIns="0" rtlCol="0" anchor="ctr"/>
-          <a:lstStyle/>
-          <a:p>
-            <a:pPr algn="l" indent="0" marL="0">
-              <a:buNone/>
-            </a:pPr>
-            <a:r>
-              <a:rPr lang="en-US" sz="900" dirty="0">
-                <a:solidFill>
-                  <a:srgbClr val="9AA3D8"/>
-                </a:solidFill>
-                <a:latin typeface="Calibri" pitchFamily="34" charset="0"/>
-                <a:ea typeface="Calibri" pitchFamily="34" charset="-122"/>
-                <a:cs typeface="Calibri" pitchFamily="34" charset="-120"/>
-              </a:rPr>
-              <a:t>Usman Akram  •  COMSATS University Islamabad</a:t>
-            </a:r>
-            <a:endParaRPr lang="en-US" sz="900" dirty="0"/>
-          </a:p>
-        </p:txBody>
-      </p:sp>
-      <p:sp>
-        <p:nvSpPr>
-          <p:cNvPr id="7" name="Text 5"/>
-          <p:cNvSpPr txBox="1"/>
-          <p:nvPr/>
-        </p:nvSpPr>
-        <p:spPr>
-          <a:xfrm>
-            <a:off x="11155680" y="6446520"/>
-            <a:ext cx="457200" cy="292608"/>
-          </a:xfrm>
-          <a:prstGeom prst="rect">
-            <a:avLst/>
-          </a:prstGeom>
-          <a:noFill/>
-          <a:ln/>
-        </p:spPr>
-        <p:txBody>
-          <a:bodyPr wrap="square" lIns="0" tIns="0" rIns="0" bIns="0" rtlCol="0" anchor="ctr"/>
-          <a:lstStyle/>
-          <a:p>
-            <a:pPr algn="r" indent="0" marL="0">
-              <a:buNone/>
-            </a:pPr>
-            <a:r>
-              <a:rPr lang="en-US" sz="900" dirty="0">
-                <a:solidFill>
-                  <a:srgbClr val="9AA3D8"/>
-                </a:solidFill>
-                <a:latin typeface="Calibri" pitchFamily="34" charset="0"/>
-                <a:ea typeface="Calibri" pitchFamily="34" charset="-122"/>
-                <a:cs typeface="Calibri" pitchFamily="34" charset="-120"/>
-              </a:rPr>
-              <a:t>1</a:t>
-            </a:r>
-            <a:endParaRPr lang="en-US" sz="900" dirty="0"/>
+          <p:cNvPr id="8" name="cuinotes-footer-mark"/>
+          <p:cNvSpPr txBox="1"/>
+          <p:nvPr/>
+        </p:nvSpPr>
+        <p:spPr>
+          <a:xfrm>
+            <a:off x="9951720" y="6455664"/>
+            <a:ext cx="2011680" cy="292608"/>
+          </a:xfrm>
+          <a:prstGeom prst="rect">
+            <a:avLst/>
+          </a:prstGeom>
+          <a:noFill/>
+        </p:spPr>
+        <p:txBody>
+          <a:bodyPr wrap="none" lIns="0" rIns="0" tIns="0" bIns="0">
+            <a:spAutoFit/>
+          </a:bodyPr>
+          <a:lstStyle/>
+          <a:p>
+            <a:pPr algn="r"/>
+            <a:r>
+              <a:rPr sz="1000">
+                <a:solidFill>
+                  <a:srgbClr val="8A939B"/>
+                </a:solidFill>
+                <a:hlinkClick r:id="rId3"/>
+              </a:rPr>
+              <a:t>cuinotes.com</a:t>
+            </a:r>
+            <a:r>
+              <a:rPr sz="1000">
+                <a:solidFill>
+                  <a:srgbClr val="8A939B"/>
+                </a:solidFill>
+              </a:rPr>
+              <a:t>  ·  1</a:t>
+            </a:r>
           </a:p>
         </p:txBody>
       </p:sp>
@@ -3668,6 +3633,10 @@
             <a:tailEnd type="triangle"/>
           </a:ln>
         </p:spPr>
+        <p:txBody>
+          <a:bodyPr/>
+          <a:p/>
+        </p:txBody>
       </p:sp>
       <p:sp>
         <p:nvSpPr>
@@ -3692,6 +3661,10 @@
             <a:tailEnd type="triangle"/>
           </a:ln>
         </p:spPr>
+        <p:txBody>
+          <a:bodyPr/>
+          <a:p/>
+        </p:txBody>
       </p:sp>
       <p:sp>
         <p:nvSpPr>
@@ -3716,6 +3689,10 @@
             <a:tailEnd type="triangle"/>
           </a:ln>
         </p:spPr>
+        <p:txBody>
+          <a:bodyPr/>
+          <a:p/>
+        </p:txBody>
       </p:sp>
       <p:sp>
         <p:nvSpPr>
@@ -3781,6 +3758,10 @@
             <a:tailEnd type="triangle"/>
           </a:ln>
         </p:spPr>
+        <p:txBody>
+          <a:bodyPr/>
+          <a:p/>
+        </p:txBody>
       </p:sp>
       <p:sp>
         <p:nvSpPr>
@@ -3846,6 +3827,10 @@
             <a:tailEnd type="triangle"/>
           </a:ln>
         </p:spPr>
+        <p:txBody>
+          <a:bodyPr/>
+          <a:p/>
+        </p:txBody>
       </p:sp>
       <p:sp>
         <p:nvSpPr>
@@ -3870,6 +3855,10 @@
             <a:tailEnd type="triangle"/>
           </a:ln>
         </p:spPr>
+        <p:txBody>
+          <a:bodyPr/>
+          <a:p/>
+        </p:txBody>
       </p:sp>
       <p:sp>
         <p:nvSpPr>
@@ -3890,6 +3879,10 @@
           </a:solidFill>
           <a:ln/>
         </p:spPr>
+        <p:txBody>
+          <a:bodyPr/>
+          <a:p/>
+        </p:txBody>
       </p:sp>
       <p:sp>
         <p:nvSpPr>
@@ -3952,6 +3945,10 @@
           </a:solidFill>
           <a:ln/>
         </p:spPr>
+        <p:txBody>
+          <a:bodyPr/>
+          <a:p/>
+        </p:txBody>
       </p:sp>
       <p:sp>
         <p:nvSpPr>
@@ -4014,6 +4011,10 @@
           </a:solidFill>
           <a:ln/>
         </p:spPr>
+        <p:txBody>
+          <a:bodyPr/>
+          <a:p/>
+        </p:txBody>
       </p:sp>
       <p:sp>
         <p:nvSpPr>
@@ -4096,6 +4097,10 @@
           </a:solidFill>
           <a:ln/>
         </p:spPr>
+        <p:txBody>
+          <a:bodyPr/>
+          <a:p/>
+        </p:txBody>
       </p:sp>
       <p:sp>
         <p:nvSpPr>
@@ -4158,6 +4163,10 @@
           </a:solidFill>
           <a:ln/>
         </p:spPr>
+        <p:txBody>
+          <a:bodyPr/>
+          <a:p/>
+        </p:txBody>
       </p:sp>
       <p:sp>
         <p:nvSpPr>
@@ -4220,6 +4229,10 @@
           </a:solidFill>
           <a:ln/>
         </p:spPr>
+        <p:txBody>
+          <a:bodyPr/>
+          <a:p/>
+        </p:txBody>
       </p:sp>
       <p:sp>
         <p:nvSpPr>
@@ -4282,6 +4295,10 @@
           </a:solidFill>
           <a:ln/>
         </p:spPr>
+        <p:txBody>
+          <a:bodyPr/>
+          <a:p/>
+        </p:txBody>
       </p:sp>
       <p:sp>
         <p:nvSpPr>
@@ -4327,79 +4344,44 @@
       </p:sp>
       <p:sp>
         <p:nvSpPr>
-          <p:cNvPr id="26" name="Text 24"/>
-          <p:cNvSpPr txBox="1"/>
-          <p:nvPr/>
-        </p:nvSpPr>
-        <p:spPr>
-          <a:xfrm>
-            <a:off x="640080" y="6446520"/>
-            <a:ext cx="8686800" cy="292608"/>
-          </a:xfrm>
-          <a:prstGeom prst="rect">
-            <a:avLst/>
-          </a:prstGeom>
-          <a:noFill/>
-          <a:ln/>
-        </p:spPr>
-        <p:txBody>
-          <a:bodyPr wrap="square" lIns="0" tIns="0" rIns="0" bIns="0" rtlCol="0" anchor="ctr"/>
-          <a:lstStyle/>
-          <a:p>
-            <a:pPr algn="l" indent="0" marL="0">
-              <a:buNone/>
-            </a:pPr>
-            <a:r>
-              <a:rPr lang="en-US" sz="900" dirty="0">
-                <a:solidFill>
-                  <a:srgbClr val="5D5D72"/>
-                </a:solidFill>
-                <a:latin typeface="Calibri" pitchFamily="34" charset="0"/>
-                <a:ea typeface="Calibri" pitchFamily="34" charset="-122"/>
-                <a:cs typeface="Calibri" pitchFamily="34" charset="-120"/>
-              </a:rPr>
-              <a:t>Usman Akram  •  COMSATS University Islamabad</a:t>
-            </a:r>
-            <a:endParaRPr lang="en-US" sz="900" dirty="0"/>
-          </a:p>
-        </p:txBody>
-      </p:sp>
-      <p:sp>
-        <p:nvSpPr>
-          <p:cNvPr id="27" name="Text 25"/>
-          <p:cNvSpPr txBox="1"/>
-          <p:nvPr/>
-        </p:nvSpPr>
-        <p:spPr>
-          <a:xfrm>
-            <a:off x="11155680" y="6446520"/>
-            <a:ext cx="457200" cy="292608"/>
-          </a:xfrm>
-          <a:prstGeom prst="rect">
-            <a:avLst/>
-          </a:prstGeom>
-          <a:noFill/>
-          <a:ln/>
-        </p:spPr>
-        <p:txBody>
-          <a:bodyPr wrap="square" lIns="0" tIns="0" rIns="0" bIns="0" rtlCol="0" anchor="ctr"/>
-          <a:lstStyle/>
-          <a:p>
-            <a:pPr algn="r" indent="0" marL="0">
-              <a:buNone/>
-            </a:pPr>
-            <a:r>
-              <a:rPr lang="en-US" sz="900" dirty="0">
-                <a:solidFill>
-                  <a:srgbClr val="5D5D72"/>
-                </a:solidFill>
-                <a:latin typeface="Calibri" pitchFamily="34" charset="0"/>
-                <a:ea typeface="Calibri" pitchFamily="34" charset="-122"/>
-                <a:cs typeface="Calibri" pitchFamily="34" charset="-120"/>
-              </a:rPr>
-              <a:t>10</a:t>
-            </a:r>
-            <a:endParaRPr lang="en-US" sz="900" dirty="0"/>
+          <p:cNvPr id="28" name="cuinotes-footer-mark"/>
+          <p:cNvSpPr txBox="1"/>
+          <p:nvPr/>
+        </p:nvSpPr>
+        <p:spPr>
+          <a:xfrm>
+            <a:off x="9951720" y="6455664"/>
+            <a:ext cx="2011680" cy="292608"/>
+          </a:xfrm>
+          <a:prstGeom prst="rect">
+            <a:avLst/>
+          </a:prstGeom>
+          <a:noFill/>
+        </p:spPr>
+        <p:txBody>
+          <a:bodyPr wrap="none" lIns="0" rIns="0" tIns="0" bIns="0">
+            <a:spAutoFit/>
+          </a:bodyPr>
+          <a:lstStyle/>
+          <a:p>
+            <a:pPr algn="r"/>
+            <a:r>
+              <a:rPr sz="1000">
+                <a:solidFill>
+                  <a:srgbClr val="8A939B"/>
+                </a:solidFill>
+                <a:hlinkClick r:id="rId3"/>
+              </a:rPr>
+              <a:t>cuinotes.com</a:t>
+            </a:r>
+            <a:r>
+              <a:rPr sz="1000">
+                <a:solidFill>
+                  <a:srgbClr val="8A939B"/>
+                </a:solidFill>
+              </a:rPr>
+              <a:t>  ·  10</a:t>
+            </a:r>
           </a:p>
         </p:txBody>
       </p:sp>
@@ -4539,6 +4521,10 @@
             <a:prstDash val="solid"/>
           </a:ln>
         </p:spPr>
+        <p:txBody>
+          <a:bodyPr/>
+          <a:p/>
+        </p:txBody>
       </p:sp>
       <p:sp>
         <p:nvSpPr>
@@ -4620,79 +4606,44 @@
       </p:sp>
       <p:sp>
         <p:nvSpPr>
-          <p:cNvPr id="7" name="Text 5"/>
-          <p:cNvSpPr txBox="1"/>
-          <p:nvPr/>
-        </p:nvSpPr>
-        <p:spPr>
-          <a:xfrm>
-            <a:off x="640080" y="6446520"/>
-            <a:ext cx="8686800" cy="292608"/>
-          </a:xfrm>
-          <a:prstGeom prst="rect">
-            <a:avLst/>
-          </a:prstGeom>
-          <a:noFill/>
-          <a:ln/>
-        </p:spPr>
-        <p:txBody>
-          <a:bodyPr wrap="square" lIns="0" tIns="0" rIns="0" bIns="0" rtlCol="0" anchor="ctr"/>
-          <a:lstStyle/>
-          <a:p>
-            <a:pPr algn="l" indent="0" marL="0">
-              <a:buNone/>
-            </a:pPr>
-            <a:r>
-              <a:rPr lang="en-US" sz="900" dirty="0">
-                <a:solidFill>
-                  <a:srgbClr val="5D5D72"/>
-                </a:solidFill>
-                <a:latin typeface="Calibri" pitchFamily="34" charset="0"/>
-                <a:ea typeface="Calibri" pitchFamily="34" charset="-122"/>
-                <a:cs typeface="Calibri" pitchFamily="34" charset="-120"/>
-              </a:rPr>
-              <a:t>Usman Akram  •  COMSATS University Islamabad</a:t>
-            </a:r>
-            <a:endParaRPr lang="en-US" sz="900" dirty="0"/>
-          </a:p>
-        </p:txBody>
-      </p:sp>
-      <p:sp>
-        <p:nvSpPr>
-          <p:cNvPr id="8" name="Text 6"/>
-          <p:cNvSpPr txBox="1"/>
-          <p:nvPr/>
-        </p:nvSpPr>
-        <p:spPr>
-          <a:xfrm>
-            <a:off x="11155680" y="6446520"/>
-            <a:ext cx="457200" cy="292608"/>
-          </a:xfrm>
-          <a:prstGeom prst="rect">
-            <a:avLst/>
-          </a:prstGeom>
-          <a:noFill/>
-          <a:ln/>
-        </p:spPr>
-        <p:txBody>
-          <a:bodyPr wrap="square" lIns="0" tIns="0" rIns="0" bIns="0" rtlCol="0" anchor="ctr"/>
-          <a:lstStyle/>
-          <a:p>
-            <a:pPr algn="r" indent="0" marL="0">
-              <a:buNone/>
-            </a:pPr>
-            <a:r>
-              <a:rPr lang="en-US" sz="900" dirty="0">
-                <a:solidFill>
-                  <a:srgbClr val="5D5D72"/>
-                </a:solidFill>
-                <a:latin typeface="Calibri" pitchFamily="34" charset="0"/>
-                <a:ea typeface="Calibri" pitchFamily="34" charset="-122"/>
-                <a:cs typeface="Calibri" pitchFamily="34" charset="-120"/>
-              </a:rPr>
-              <a:t>11</a:t>
-            </a:r>
-            <a:endParaRPr lang="en-US" sz="900" dirty="0"/>
+          <p:cNvPr id="9" name="cuinotes-footer-mark"/>
+          <p:cNvSpPr txBox="1"/>
+          <p:nvPr/>
+        </p:nvSpPr>
+        <p:spPr>
+          <a:xfrm>
+            <a:off x="9951720" y="6455664"/>
+            <a:ext cx="2011680" cy="292608"/>
+          </a:xfrm>
+          <a:prstGeom prst="rect">
+            <a:avLst/>
+          </a:prstGeom>
+          <a:noFill/>
+        </p:spPr>
+        <p:txBody>
+          <a:bodyPr wrap="none" lIns="0" rIns="0" tIns="0" bIns="0">
+            <a:spAutoFit/>
+          </a:bodyPr>
+          <a:lstStyle/>
+          <a:p>
+            <a:pPr algn="r"/>
+            <a:r>
+              <a:rPr sz="1000">
+                <a:solidFill>
+                  <a:srgbClr val="8A939B"/>
+                </a:solidFill>
+                <a:hlinkClick r:id="rId3"/>
+              </a:rPr>
+              <a:t>cuinotes.com</a:t>
+            </a:r>
+            <a:r>
+              <a:rPr sz="1000">
+                <a:solidFill>
+                  <a:srgbClr val="8A939B"/>
+                </a:solidFill>
+              </a:rPr>
+              <a:t>  ·  11</a:t>
+            </a:r>
           </a:p>
         </p:txBody>
       </p:sp>
@@ -4825,6 +4776,10 @@
           </a:solidFill>
           <a:ln/>
         </p:spPr>
+        <p:txBody>
+          <a:bodyPr/>
+          <a:p/>
+        </p:txBody>
       </p:sp>
       <p:sp>
         <p:nvSpPr>
@@ -4923,6 +4878,10 @@
           </a:solidFill>
           <a:ln/>
         </p:spPr>
+        <p:txBody>
+          <a:bodyPr/>
+          <a:p/>
+        </p:txBody>
       </p:sp>
       <p:sp>
         <p:nvSpPr>
@@ -5021,6 +4980,10 @@
           </a:solidFill>
           <a:ln/>
         </p:spPr>
+        <p:txBody>
+          <a:bodyPr/>
+          <a:p/>
+        </p:txBody>
       </p:sp>
       <p:sp>
         <p:nvSpPr>
@@ -5102,79 +5065,44 @@
       </p:sp>
       <p:sp>
         <p:nvSpPr>
-          <p:cNvPr id="13" name="Text 11"/>
-          <p:cNvSpPr txBox="1"/>
-          <p:nvPr/>
-        </p:nvSpPr>
-        <p:spPr>
-          <a:xfrm>
-            <a:off x="640080" y="6446520"/>
-            <a:ext cx="8686800" cy="292608"/>
-          </a:xfrm>
-          <a:prstGeom prst="rect">
-            <a:avLst/>
-          </a:prstGeom>
-          <a:noFill/>
-          <a:ln/>
-        </p:spPr>
-        <p:txBody>
-          <a:bodyPr wrap="square" lIns="0" tIns="0" rIns="0" bIns="0" rtlCol="0" anchor="ctr"/>
-          <a:lstStyle/>
-          <a:p>
-            <a:pPr algn="l" indent="0" marL="0">
-              <a:buNone/>
-            </a:pPr>
-            <a:r>
-              <a:rPr lang="en-US" sz="900" dirty="0">
-                <a:solidFill>
-                  <a:srgbClr val="5D5D72"/>
-                </a:solidFill>
-                <a:latin typeface="Calibri" pitchFamily="34" charset="0"/>
-                <a:ea typeface="Calibri" pitchFamily="34" charset="-122"/>
-                <a:cs typeface="Calibri" pitchFamily="34" charset="-120"/>
-              </a:rPr>
-              <a:t>Usman Akram  •  COMSATS University Islamabad</a:t>
-            </a:r>
-            <a:endParaRPr lang="en-US" sz="900" dirty="0"/>
-          </a:p>
-        </p:txBody>
-      </p:sp>
-      <p:sp>
-        <p:nvSpPr>
-          <p:cNvPr id="14" name="Text 12"/>
-          <p:cNvSpPr txBox="1"/>
-          <p:nvPr/>
-        </p:nvSpPr>
-        <p:spPr>
-          <a:xfrm>
-            <a:off x="11155680" y="6446520"/>
-            <a:ext cx="457200" cy="292608"/>
-          </a:xfrm>
-          <a:prstGeom prst="rect">
-            <a:avLst/>
-          </a:prstGeom>
-          <a:noFill/>
-          <a:ln/>
-        </p:spPr>
-        <p:txBody>
-          <a:bodyPr wrap="square" lIns="0" tIns="0" rIns="0" bIns="0" rtlCol="0" anchor="ctr"/>
-          <a:lstStyle/>
-          <a:p>
-            <a:pPr algn="r" indent="0" marL="0">
-              <a:buNone/>
-            </a:pPr>
-            <a:r>
-              <a:rPr lang="en-US" sz="900" dirty="0">
-                <a:solidFill>
-                  <a:srgbClr val="5D5D72"/>
-                </a:solidFill>
-                <a:latin typeface="Calibri" pitchFamily="34" charset="0"/>
-                <a:ea typeface="Calibri" pitchFamily="34" charset="-122"/>
-                <a:cs typeface="Calibri" pitchFamily="34" charset="-120"/>
-              </a:rPr>
-              <a:t>12</a:t>
-            </a:r>
-            <a:endParaRPr lang="en-US" sz="900" dirty="0"/>
+          <p:cNvPr id="15" name="cuinotes-footer-mark"/>
+          <p:cNvSpPr txBox="1"/>
+          <p:nvPr/>
+        </p:nvSpPr>
+        <p:spPr>
+          <a:xfrm>
+            <a:off x="9951720" y="6455664"/>
+            <a:ext cx="2011680" cy="292608"/>
+          </a:xfrm>
+          <a:prstGeom prst="rect">
+            <a:avLst/>
+          </a:prstGeom>
+          <a:noFill/>
+        </p:spPr>
+        <p:txBody>
+          <a:bodyPr wrap="none" lIns="0" rIns="0" tIns="0" bIns="0">
+            <a:spAutoFit/>
+          </a:bodyPr>
+          <a:lstStyle/>
+          <a:p>
+            <a:pPr algn="r"/>
+            <a:r>
+              <a:rPr sz="1000">
+                <a:solidFill>
+                  <a:srgbClr val="8A939B"/>
+                </a:solidFill>
+                <a:hlinkClick r:id="rId3"/>
+              </a:rPr>
+              <a:t>cuinotes.com</a:t>
+            </a:r>
+            <a:r>
+              <a:rPr sz="1000">
+                <a:solidFill>
+                  <a:srgbClr val="8A939B"/>
+                </a:solidFill>
+              </a:rPr>
+              <a:t>  ·  12</a:t>
+            </a:r>
           </a:p>
         </p:txBody>
       </p:sp>
@@ -5309,6 +5237,10 @@
           </a:solidFill>
           <a:ln/>
         </p:spPr>
+        <p:txBody>
+          <a:bodyPr/>
+          <a:p/>
+        </p:txBody>
       </p:sp>
       <p:sp>
         <p:nvSpPr>
@@ -5453,79 +5385,44 @@
       </p:sp>
       <p:sp>
         <p:nvSpPr>
-          <p:cNvPr id="7" name="Text 5"/>
-          <p:cNvSpPr txBox="1"/>
-          <p:nvPr/>
-        </p:nvSpPr>
-        <p:spPr>
-          <a:xfrm>
-            <a:off x="640080" y="6446520"/>
-            <a:ext cx="8686800" cy="292608"/>
-          </a:xfrm>
-          <a:prstGeom prst="rect">
-            <a:avLst/>
-          </a:prstGeom>
-          <a:noFill/>
-          <a:ln/>
-        </p:spPr>
-        <p:txBody>
-          <a:bodyPr wrap="square" lIns="0" tIns="0" rIns="0" bIns="0" rtlCol="0" anchor="ctr"/>
-          <a:lstStyle/>
-          <a:p>
-            <a:pPr algn="l" indent="0" marL="0">
-              <a:buNone/>
-            </a:pPr>
-            <a:r>
-              <a:rPr lang="en-US" sz="900" dirty="0">
-                <a:solidFill>
-                  <a:srgbClr val="5D5D72"/>
-                </a:solidFill>
-                <a:latin typeface="Calibri" pitchFamily="34" charset="0"/>
-                <a:ea typeface="Calibri" pitchFamily="34" charset="-122"/>
-                <a:cs typeface="Calibri" pitchFamily="34" charset="-120"/>
-              </a:rPr>
-              <a:t>Usman Akram  •  COMSATS University Islamabad</a:t>
-            </a:r>
-            <a:endParaRPr lang="en-US" sz="900" dirty="0"/>
-          </a:p>
-        </p:txBody>
-      </p:sp>
-      <p:sp>
-        <p:nvSpPr>
-          <p:cNvPr id="8" name="Text 6"/>
-          <p:cNvSpPr txBox="1"/>
-          <p:nvPr/>
-        </p:nvSpPr>
-        <p:spPr>
-          <a:xfrm>
-            <a:off x="11155680" y="6446520"/>
-            <a:ext cx="457200" cy="292608"/>
-          </a:xfrm>
-          <a:prstGeom prst="rect">
-            <a:avLst/>
-          </a:prstGeom>
-          <a:noFill/>
-          <a:ln/>
-        </p:spPr>
-        <p:txBody>
-          <a:bodyPr wrap="square" lIns="0" tIns="0" rIns="0" bIns="0" rtlCol="0" anchor="ctr"/>
-          <a:lstStyle/>
-          <a:p>
-            <a:pPr algn="r" indent="0" marL="0">
-              <a:buNone/>
-            </a:pPr>
-            <a:r>
-              <a:rPr lang="en-US" sz="900" dirty="0">
-                <a:solidFill>
-                  <a:srgbClr val="5D5D72"/>
-                </a:solidFill>
-                <a:latin typeface="Calibri" pitchFamily="34" charset="0"/>
-                <a:ea typeface="Calibri" pitchFamily="34" charset="-122"/>
-                <a:cs typeface="Calibri" pitchFamily="34" charset="-120"/>
-              </a:rPr>
-              <a:t>13</a:t>
-            </a:r>
-            <a:endParaRPr lang="en-US" sz="900" dirty="0"/>
+          <p:cNvPr id="9" name="cuinotes-footer-mark"/>
+          <p:cNvSpPr txBox="1"/>
+          <p:nvPr/>
+        </p:nvSpPr>
+        <p:spPr>
+          <a:xfrm>
+            <a:off x="9951720" y="6455664"/>
+            <a:ext cx="2011680" cy="292608"/>
+          </a:xfrm>
+          <a:prstGeom prst="rect">
+            <a:avLst/>
+          </a:prstGeom>
+          <a:noFill/>
+        </p:spPr>
+        <p:txBody>
+          <a:bodyPr wrap="none" lIns="0" rIns="0" tIns="0" bIns="0">
+            <a:spAutoFit/>
+          </a:bodyPr>
+          <a:lstStyle/>
+          <a:p>
+            <a:pPr algn="r"/>
+            <a:r>
+              <a:rPr sz="1000">
+                <a:solidFill>
+                  <a:srgbClr val="8A939B"/>
+                </a:solidFill>
+                <a:hlinkClick r:id="rId3"/>
+              </a:rPr>
+              <a:t>cuinotes.com</a:t>
+            </a:r>
+            <a:r>
+              <a:rPr sz="1000">
+                <a:solidFill>
+                  <a:srgbClr val="8A939B"/>
+                </a:solidFill>
+              </a:rPr>
+              <a:t>  ·  13</a:t>
+            </a:r>
           </a:p>
         </p:txBody>
       </p:sp>
@@ -5660,6 +5557,10 @@
           </a:solidFill>
           <a:ln/>
         </p:spPr>
+        <p:txBody>
+          <a:bodyPr/>
+          <a:p/>
+        </p:txBody>
       </p:sp>
       <p:sp>
         <p:nvSpPr>
@@ -5885,79 +5786,44 @@
       </p:sp>
       <p:sp>
         <p:nvSpPr>
-          <p:cNvPr id="6" name="Text 4"/>
-          <p:cNvSpPr txBox="1"/>
-          <p:nvPr/>
-        </p:nvSpPr>
-        <p:spPr>
-          <a:xfrm>
-            <a:off x="640080" y="6446520"/>
-            <a:ext cx="8686800" cy="292608"/>
-          </a:xfrm>
-          <a:prstGeom prst="rect">
-            <a:avLst/>
-          </a:prstGeom>
-          <a:noFill/>
-          <a:ln/>
-        </p:spPr>
-        <p:txBody>
-          <a:bodyPr wrap="square" lIns="0" tIns="0" rIns="0" bIns="0" rtlCol="0" anchor="ctr"/>
-          <a:lstStyle/>
-          <a:p>
-            <a:pPr algn="l" indent="0" marL="0">
-              <a:buNone/>
-            </a:pPr>
-            <a:r>
-              <a:rPr lang="en-US" sz="900" dirty="0">
-                <a:solidFill>
-                  <a:srgbClr val="5D5D72"/>
-                </a:solidFill>
-                <a:latin typeface="Calibri" pitchFamily="34" charset="0"/>
-                <a:ea typeface="Calibri" pitchFamily="34" charset="-122"/>
-                <a:cs typeface="Calibri" pitchFamily="34" charset="-120"/>
-              </a:rPr>
-              <a:t>Usman Akram  •  COMSATS University Islamabad</a:t>
-            </a:r>
-            <a:endParaRPr lang="en-US" sz="900" dirty="0"/>
-          </a:p>
-        </p:txBody>
-      </p:sp>
-      <p:sp>
-        <p:nvSpPr>
-          <p:cNvPr id="7" name="Text 5"/>
-          <p:cNvSpPr txBox="1"/>
-          <p:nvPr/>
-        </p:nvSpPr>
-        <p:spPr>
-          <a:xfrm>
-            <a:off x="11155680" y="6446520"/>
-            <a:ext cx="457200" cy="292608"/>
-          </a:xfrm>
-          <a:prstGeom prst="rect">
-            <a:avLst/>
-          </a:prstGeom>
-          <a:noFill/>
-          <a:ln/>
-        </p:spPr>
-        <p:txBody>
-          <a:bodyPr wrap="square" lIns="0" tIns="0" rIns="0" bIns="0" rtlCol="0" anchor="ctr"/>
-          <a:lstStyle/>
-          <a:p>
-            <a:pPr algn="r" indent="0" marL="0">
-              <a:buNone/>
-            </a:pPr>
-            <a:r>
-              <a:rPr lang="en-US" sz="900" dirty="0">
-                <a:solidFill>
-                  <a:srgbClr val="5D5D72"/>
-                </a:solidFill>
-                <a:latin typeface="Calibri" pitchFamily="34" charset="0"/>
-                <a:ea typeface="Calibri" pitchFamily="34" charset="-122"/>
-                <a:cs typeface="Calibri" pitchFamily="34" charset="-120"/>
-              </a:rPr>
-              <a:t>14</a:t>
-            </a:r>
-            <a:endParaRPr lang="en-US" sz="900" dirty="0"/>
+          <p:cNvPr id="8" name="cuinotes-footer-mark"/>
+          <p:cNvSpPr txBox="1"/>
+          <p:nvPr/>
+        </p:nvSpPr>
+        <p:spPr>
+          <a:xfrm>
+            <a:off x="9951720" y="6455664"/>
+            <a:ext cx="2011680" cy="292608"/>
+          </a:xfrm>
+          <a:prstGeom prst="rect">
+            <a:avLst/>
+          </a:prstGeom>
+          <a:noFill/>
+        </p:spPr>
+        <p:txBody>
+          <a:bodyPr wrap="none" lIns="0" rIns="0" tIns="0" bIns="0">
+            <a:spAutoFit/>
+          </a:bodyPr>
+          <a:lstStyle/>
+          <a:p>
+            <a:pPr algn="r"/>
+            <a:r>
+              <a:rPr sz="1000">
+                <a:solidFill>
+                  <a:srgbClr val="8A939B"/>
+                </a:solidFill>
+                <a:hlinkClick r:id="rId3"/>
+              </a:rPr>
+              <a:t>cuinotes.com</a:t>
+            </a:r>
+            <a:r>
+              <a:rPr sz="1000">
+                <a:solidFill>
+                  <a:srgbClr val="8A939B"/>
+                </a:solidFill>
+              </a:rPr>
+              <a:t>  ·  14</a:t>
+            </a:r>
           </a:p>
         </p:txBody>
       </p:sp>
@@ -6092,6 +5958,10 @@
           </a:solidFill>
           <a:ln/>
         </p:spPr>
+        <p:txBody>
+          <a:bodyPr/>
+          <a:p/>
+        </p:txBody>
       </p:sp>
       <p:sp>
         <p:nvSpPr>
@@ -6325,79 +6195,44 @@
       </p:sp>
       <p:sp>
         <p:nvSpPr>
-          <p:cNvPr id="7" name="Text 5"/>
-          <p:cNvSpPr txBox="1"/>
-          <p:nvPr/>
-        </p:nvSpPr>
-        <p:spPr>
-          <a:xfrm>
-            <a:off x="640080" y="6446520"/>
-            <a:ext cx="8686800" cy="292608"/>
-          </a:xfrm>
-          <a:prstGeom prst="rect">
-            <a:avLst/>
-          </a:prstGeom>
-          <a:noFill/>
-          <a:ln/>
-        </p:spPr>
-        <p:txBody>
-          <a:bodyPr wrap="square" lIns="0" tIns="0" rIns="0" bIns="0" rtlCol="0" anchor="ctr"/>
-          <a:lstStyle/>
-          <a:p>
-            <a:pPr algn="l" indent="0" marL="0">
-              <a:buNone/>
-            </a:pPr>
-            <a:r>
-              <a:rPr lang="en-US" sz="900" dirty="0">
-                <a:solidFill>
-                  <a:srgbClr val="5D5D72"/>
-                </a:solidFill>
-                <a:latin typeface="Calibri" pitchFamily="34" charset="0"/>
-                <a:ea typeface="Calibri" pitchFamily="34" charset="-122"/>
-                <a:cs typeface="Calibri" pitchFamily="34" charset="-120"/>
-              </a:rPr>
-              <a:t>Usman Akram  •  COMSATS University Islamabad</a:t>
-            </a:r>
-            <a:endParaRPr lang="en-US" sz="900" dirty="0"/>
-          </a:p>
-        </p:txBody>
-      </p:sp>
-      <p:sp>
-        <p:nvSpPr>
-          <p:cNvPr id="8" name="Text 6"/>
-          <p:cNvSpPr txBox="1"/>
-          <p:nvPr/>
-        </p:nvSpPr>
-        <p:spPr>
-          <a:xfrm>
-            <a:off x="11155680" y="6446520"/>
-            <a:ext cx="457200" cy="292608"/>
-          </a:xfrm>
-          <a:prstGeom prst="rect">
-            <a:avLst/>
-          </a:prstGeom>
-          <a:noFill/>
-          <a:ln/>
-        </p:spPr>
-        <p:txBody>
-          <a:bodyPr wrap="square" lIns="0" tIns="0" rIns="0" bIns="0" rtlCol="0" anchor="ctr"/>
-          <a:lstStyle/>
-          <a:p>
-            <a:pPr algn="r" indent="0" marL="0">
-              <a:buNone/>
-            </a:pPr>
-            <a:r>
-              <a:rPr lang="en-US" sz="900" dirty="0">
-                <a:solidFill>
-                  <a:srgbClr val="5D5D72"/>
-                </a:solidFill>
-                <a:latin typeface="Calibri" pitchFamily="34" charset="0"/>
-                <a:ea typeface="Calibri" pitchFamily="34" charset="-122"/>
-                <a:cs typeface="Calibri" pitchFamily="34" charset="-120"/>
-              </a:rPr>
-              <a:t>15</a:t>
-            </a:r>
-            <a:endParaRPr lang="en-US" sz="900" dirty="0"/>
+          <p:cNvPr id="9" name="cuinotes-footer-mark"/>
+          <p:cNvSpPr txBox="1"/>
+          <p:nvPr/>
+        </p:nvSpPr>
+        <p:spPr>
+          <a:xfrm>
+            <a:off x="9951720" y="6455664"/>
+            <a:ext cx="2011680" cy="292608"/>
+          </a:xfrm>
+          <a:prstGeom prst="rect">
+            <a:avLst/>
+          </a:prstGeom>
+          <a:noFill/>
+        </p:spPr>
+        <p:txBody>
+          <a:bodyPr wrap="none" lIns="0" rIns="0" tIns="0" bIns="0">
+            <a:spAutoFit/>
+          </a:bodyPr>
+          <a:lstStyle/>
+          <a:p>
+            <a:pPr algn="r"/>
+            <a:r>
+              <a:rPr sz="1000">
+                <a:solidFill>
+                  <a:srgbClr val="8A939B"/>
+                </a:solidFill>
+                <a:hlinkClick r:id="rId3"/>
+              </a:rPr>
+              <a:t>cuinotes.com</a:t>
+            </a:r>
+            <a:r>
+              <a:rPr sz="1000">
+                <a:solidFill>
+                  <a:srgbClr val="8A939B"/>
+                </a:solidFill>
+              </a:rPr>
+              <a:t>  ·  15</a:t>
+            </a:r>
           </a:p>
         </p:txBody>
       </p:sp>
@@ -6530,6 +6365,10 @@
           </a:solidFill>
           <a:ln/>
         </p:spPr>
+        <p:txBody>
+          <a:bodyPr/>
+          <a:p/>
+        </p:txBody>
       </p:sp>
       <p:sp>
         <p:nvSpPr>
@@ -6628,6 +6467,10 @@
           </a:solidFill>
           <a:ln/>
         </p:spPr>
+        <p:txBody>
+          <a:bodyPr/>
+          <a:p/>
+        </p:txBody>
       </p:sp>
       <p:sp>
         <p:nvSpPr>
@@ -6726,6 +6569,10 @@
           </a:solidFill>
           <a:ln/>
         </p:spPr>
+        <p:txBody>
+          <a:bodyPr/>
+          <a:p/>
+        </p:txBody>
       </p:sp>
       <p:sp>
         <p:nvSpPr>
@@ -6807,79 +6654,44 @@
       </p:sp>
       <p:sp>
         <p:nvSpPr>
-          <p:cNvPr id="13" name="Text 11"/>
-          <p:cNvSpPr txBox="1"/>
-          <p:nvPr/>
-        </p:nvSpPr>
-        <p:spPr>
-          <a:xfrm>
-            <a:off x="640080" y="6446520"/>
-            <a:ext cx="8686800" cy="292608"/>
-          </a:xfrm>
-          <a:prstGeom prst="rect">
-            <a:avLst/>
-          </a:prstGeom>
-          <a:noFill/>
-          <a:ln/>
-        </p:spPr>
-        <p:txBody>
-          <a:bodyPr wrap="square" lIns="0" tIns="0" rIns="0" bIns="0" rtlCol="0" anchor="ctr"/>
-          <a:lstStyle/>
-          <a:p>
-            <a:pPr algn="l" indent="0" marL="0">
-              <a:buNone/>
-            </a:pPr>
-            <a:r>
-              <a:rPr lang="en-US" sz="900" dirty="0">
-                <a:solidFill>
-                  <a:srgbClr val="5D5D72"/>
-                </a:solidFill>
-                <a:latin typeface="Calibri" pitchFamily="34" charset="0"/>
-                <a:ea typeface="Calibri" pitchFamily="34" charset="-122"/>
-                <a:cs typeface="Calibri" pitchFamily="34" charset="-120"/>
-              </a:rPr>
-              <a:t>Usman Akram  •  COMSATS University Islamabad</a:t>
-            </a:r>
-            <a:endParaRPr lang="en-US" sz="900" dirty="0"/>
-          </a:p>
-        </p:txBody>
-      </p:sp>
-      <p:sp>
-        <p:nvSpPr>
-          <p:cNvPr id="14" name="Text 12"/>
-          <p:cNvSpPr txBox="1"/>
-          <p:nvPr/>
-        </p:nvSpPr>
-        <p:spPr>
-          <a:xfrm>
-            <a:off x="11155680" y="6446520"/>
-            <a:ext cx="457200" cy="292608"/>
-          </a:xfrm>
-          <a:prstGeom prst="rect">
-            <a:avLst/>
-          </a:prstGeom>
-          <a:noFill/>
-          <a:ln/>
-        </p:spPr>
-        <p:txBody>
-          <a:bodyPr wrap="square" lIns="0" tIns="0" rIns="0" bIns="0" rtlCol="0" anchor="ctr"/>
-          <a:lstStyle/>
-          <a:p>
-            <a:pPr algn="r" indent="0" marL="0">
-              <a:buNone/>
-            </a:pPr>
-            <a:r>
-              <a:rPr lang="en-US" sz="900" dirty="0">
-                <a:solidFill>
-                  <a:srgbClr val="5D5D72"/>
-                </a:solidFill>
-                <a:latin typeface="Calibri" pitchFamily="34" charset="0"/>
-                <a:ea typeface="Calibri" pitchFamily="34" charset="-122"/>
-                <a:cs typeface="Calibri" pitchFamily="34" charset="-120"/>
-              </a:rPr>
-              <a:t>16</a:t>
-            </a:r>
-            <a:endParaRPr lang="en-US" sz="900" dirty="0"/>
+          <p:cNvPr id="15" name="cuinotes-footer-mark"/>
+          <p:cNvSpPr txBox="1"/>
+          <p:nvPr/>
+        </p:nvSpPr>
+        <p:spPr>
+          <a:xfrm>
+            <a:off x="9951720" y="6455664"/>
+            <a:ext cx="2011680" cy="292608"/>
+          </a:xfrm>
+          <a:prstGeom prst="rect">
+            <a:avLst/>
+          </a:prstGeom>
+          <a:noFill/>
+        </p:spPr>
+        <p:txBody>
+          <a:bodyPr wrap="none" lIns="0" rIns="0" tIns="0" bIns="0">
+            <a:spAutoFit/>
+          </a:bodyPr>
+          <a:lstStyle/>
+          <a:p>
+            <a:pPr algn="r"/>
+            <a:r>
+              <a:rPr sz="1000">
+                <a:solidFill>
+                  <a:srgbClr val="8A939B"/>
+                </a:solidFill>
+                <a:hlinkClick r:id="rId3"/>
+              </a:rPr>
+              <a:t>cuinotes.com</a:t>
+            </a:r>
+            <a:r>
+              <a:rPr sz="1000">
+                <a:solidFill>
+                  <a:srgbClr val="8A939B"/>
+                </a:solidFill>
+              </a:rPr>
+              <a:t>  ·  16</a:t>
+            </a:r>
           </a:p>
         </p:txBody>
       </p:sp>
@@ -7014,6 +6826,10 @@
           </a:solidFill>
           <a:ln/>
         </p:spPr>
+        <p:txBody>
+          <a:bodyPr/>
+          <a:p/>
+        </p:txBody>
       </p:sp>
       <p:sp>
         <p:nvSpPr>
@@ -7108,79 +6924,44 @@
       </p:sp>
       <p:sp>
         <p:nvSpPr>
-          <p:cNvPr id="6" name="Text 4"/>
-          <p:cNvSpPr txBox="1"/>
-          <p:nvPr/>
-        </p:nvSpPr>
-        <p:spPr>
-          <a:xfrm>
-            <a:off x="640080" y="6446520"/>
-            <a:ext cx="8686800" cy="292608"/>
-          </a:xfrm>
-          <a:prstGeom prst="rect">
-            <a:avLst/>
-          </a:prstGeom>
-          <a:noFill/>
-          <a:ln/>
-        </p:spPr>
-        <p:txBody>
-          <a:bodyPr wrap="square" lIns="0" tIns="0" rIns="0" bIns="0" rtlCol="0" anchor="ctr"/>
-          <a:lstStyle/>
-          <a:p>
-            <a:pPr algn="l" indent="0" marL="0">
-              <a:buNone/>
-            </a:pPr>
-            <a:r>
-              <a:rPr lang="en-US" sz="900" dirty="0">
-                <a:solidFill>
-                  <a:srgbClr val="5D5D72"/>
-                </a:solidFill>
-                <a:latin typeface="Calibri" pitchFamily="34" charset="0"/>
-                <a:ea typeface="Calibri" pitchFamily="34" charset="-122"/>
-                <a:cs typeface="Calibri" pitchFamily="34" charset="-120"/>
-              </a:rPr>
-              <a:t>Usman Akram  •  COMSATS University Islamabad</a:t>
-            </a:r>
-            <a:endParaRPr lang="en-US" sz="900" dirty="0"/>
-          </a:p>
-        </p:txBody>
-      </p:sp>
-      <p:sp>
-        <p:nvSpPr>
-          <p:cNvPr id="7" name="Text 5"/>
-          <p:cNvSpPr txBox="1"/>
-          <p:nvPr/>
-        </p:nvSpPr>
-        <p:spPr>
-          <a:xfrm>
-            <a:off x="11155680" y="6446520"/>
-            <a:ext cx="457200" cy="292608"/>
-          </a:xfrm>
-          <a:prstGeom prst="rect">
-            <a:avLst/>
-          </a:prstGeom>
-          <a:noFill/>
-          <a:ln/>
-        </p:spPr>
-        <p:txBody>
-          <a:bodyPr wrap="square" lIns="0" tIns="0" rIns="0" bIns="0" rtlCol="0" anchor="ctr"/>
-          <a:lstStyle/>
-          <a:p>
-            <a:pPr algn="r" indent="0" marL="0">
-              <a:buNone/>
-            </a:pPr>
-            <a:r>
-              <a:rPr lang="en-US" sz="900" dirty="0">
-                <a:solidFill>
-                  <a:srgbClr val="5D5D72"/>
-                </a:solidFill>
-                <a:latin typeface="Calibri" pitchFamily="34" charset="0"/>
-                <a:ea typeface="Calibri" pitchFamily="34" charset="-122"/>
-                <a:cs typeface="Calibri" pitchFamily="34" charset="-120"/>
-              </a:rPr>
-              <a:t>17</a:t>
-            </a:r>
-            <a:endParaRPr lang="en-US" sz="900" dirty="0"/>
+          <p:cNvPr id="8" name="cuinotes-footer-mark"/>
+          <p:cNvSpPr txBox="1"/>
+          <p:nvPr/>
+        </p:nvSpPr>
+        <p:spPr>
+          <a:xfrm>
+            <a:off x="9951720" y="6455664"/>
+            <a:ext cx="2011680" cy="292608"/>
+          </a:xfrm>
+          <a:prstGeom prst="rect">
+            <a:avLst/>
+          </a:prstGeom>
+          <a:noFill/>
+        </p:spPr>
+        <p:txBody>
+          <a:bodyPr wrap="none" lIns="0" rIns="0" tIns="0" bIns="0">
+            <a:spAutoFit/>
+          </a:bodyPr>
+          <a:lstStyle/>
+          <a:p>
+            <a:pPr algn="r"/>
+            <a:r>
+              <a:rPr sz="1000">
+                <a:solidFill>
+                  <a:srgbClr val="8A939B"/>
+                </a:solidFill>
+                <a:hlinkClick r:id="rId3"/>
+              </a:rPr>
+              <a:t>cuinotes.com</a:t>
+            </a:r>
+            <a:r>
+              <a:rPr sz="1000">
+                <a:solidFill>
+                  <a:srgbClr val="8A939B"/>
+                </a:solidFill>
+              </a:rPr>
+              <a:t>  ·  17</a:t>
+            </a:r>
           </a:p>
         </p:txBody>
       </p:sp>
@@ -7315,6 +7096,10 @@
           </a:solidFill>
           <a:ln/>
         </p:spPr>
+        <p:txBody>
+          <a:bodyPr/>
+          <a:p/>
+        </p:txBody>
       </p:sp>
       <p:sp>
         <p:nvSpPr>
@@ -7591,6 +7376,10 @@
             </a:outerShdw>
           </a:effectLst>
         </p:spPr>
+        <p:txBody>
+          <a:bodyPr/>
+          <a:p/>
+        </p:txBody>
       </p:sp>
       <p:pic>
         <p:nvPicPr>
@@ -7618,79 +7407,44 @@
       </p:pic>
       <p:sp>
         <p:nvSpPr>
-          <p:cNvPr id="8" name="Text 5"/>
-          <p:cNvSpPr txBox="1"/>
-          <p:nvPr/>
-        </p:nvSpPr>
-        <p:spPr>
-          <a:xfrm>
-            <a:off x="640080" y="6446520"/>
-            <a:ext cx="8686800" cy="292608"/>
-          </a:xfrm>
-          <a:prstGeom prst="rect">
-            <a:avLst/>
-          </a:prstGeom>
-          <a:noFill/>
-          <a:ln/>
-        </p:spPr>
-        <p:txBody>
-          <a:bodyPr wrap="square" lIns="0" tIns="0" rIns="0" bIns="0" rtlCol="0" anchor="ctr"/>
-          <a:lstStyle/>
-          <a:p>
-            <a:pPr algn="l" indent="0" marL="0">
-              <a:buNone/>
-            </a:pPr>
-            <a:r>
-              <a:rPr lang="en-US" sz="900" dirty="0">
-                <a:solidFill>
-                  <a:srgbClr val="5D5D72"/>
-                </a:solidFill>
-                <a:latin typeface="Calibri" pitchFamily="34" charset="0"/>
-                <a:ea typeface="Calibri" pitchFamily="34" charset="-122"/>
-                <a:cs typeface="Calibri" pitchFamily="34" charset="-120"/>
-              </a:rPr>
-              <a:t>Usman Akram  •  COMSATS University Islamabad</a:t>
-            </a:r>
-            <a:endParaRPr lang="en-US" sz="900" dirty="0"/>
-          </a:p>
-        </p:txBody>
-      </p:sp>
-      <p:sp>
-        <p:nvSpPr>
-          <p:cNvPr id="9" name="Text 6"/>
-          <p:cNvSpPr txBox="1"/>
-          <p:nvPr/>
-        </p:nvSpPr>
-        <p:spPr>
-          <a:xfrm>
-            <a:off x="11155680" y="6446520"/>
-            <a:ext cx="457200" cy="292608"/>
-          </a:xfrm>
-          <a:prstGeom prst="rect">
-            <a:avLst/>
-          </a:prstGeom>
-          <a:noFill/>
-          <a:ln/>
-        </p:spPr>
-        <p:txBody>
-          <a:bodyPr wrap="square" lIns="0" tIns="0" rIns="0" bIns="0" rtlCol="0" anchor="ctr"/>
-          <a:lstStyle/>
-          <a:p>
-            <a:pPr algn="r" indent="0" marL="0">
-              <a:buNone/>
-            </a:pPr>
-            <a:r>
-              <a:rPr lang="en-US" sz="900" dirty="0">
-                <a:solidFill>
-                  <a:srgbClr val="5D5D72"/>
-                </a:solidFill>
-                <a:latin typeface="Calibri" pitchFamily="34" charset="0"/>
-                <a:ea typeface="Calibri" pitchFamily="34" charset="-122"/>
-                <a:cs typeface="Calibri" pitchFamily="34" charset="-120"/>
-              </a:rPr>
-              <a:t>18</a:t>
-            </a:r>
-            <a:endParaRPr lang="en-US" sz="900" dirty="0"/>
+          <p:cNvPr id="10" name="cuinotes-footer-mark"/>
+          <p:cNvSpPr txBox="1"/>
+          <p:nvPr/>
+        </p:nvSpPr>
+        <p:spPr>
+          <a:xfrm>
+            <a:off x="9951720" y="6455664"/>
+            <a:ext cx="2011680" cy="292608"/>
+          </a:xfrm>
+          <a:prstGeom prst="rect">
+            <a:avLst/>
+          </a:prstGeom>
+          <a:noFill/>
+        </p:spPr>
+        <p:txBody>
+          <a:bodyPr wrap="none" lIns="0" rIns="0" tIns="0" bIns="0">
+            <a:spAutoFit/>
+          </a:bodyPr>
+          <a:lstStyle/>
+          <a:p>
+            <a:pPr algn="r"/>
+            <a:r>
+              <a:rPr sz="1000">
+                <a:solidFill>
+                  <a:srgbClr val="8A939B"/>
+                </a:solidFill>
+                <a:hlinkClick r:id="rId4"/>
+              </a:rPr>
+              <a:t>cuinotes.com</a:t>
+            </a:r>
+            <a:r>
+              <a:rPr sz="1000">
+                <a:solidFill>
+                  <a:srgbClr val="8A939B"/>
+                </a:solidFill>
+              </a:rPr>
+              <a:t>  ·  18</a:t>
+            </a:r>
           </a:p>
         </p:txBody>
       </p:sp>
@@ -7830,6 +7584,10 @@
             <a:prstDash val="solid"/>
           </a:ln>
         </p:spPr>
+        <p:txBody>
+          <a:bodyPr/>
+          <a:p/>
+        </p:txBody>
       </p:sp>
       <p:sp>
         <p:nvSpPr>
@@ -7911,79 +7669,44 @@
       </p:sp>
       <p:sp>
         <p:nvSpPr>
-          <p:cNvPr id="7" name="Text 5"/>
-          <p:cNvSpPr txBox="1"/>
-          <p:nvPr/>
-        </p:nvSpPr>
-        <p:spPr>
-          <a:xfrm>
-            <a:off x="640080" y="6446520"/>
-            <a:ext cx="8686800" cy="292608"/>
-          </a:xfrm>
-          <a:prstGeom prst="rect">
-            <a:avLst/>
-          </a:prstGeom>
-          <a:noFill/>
-          <a:ln/>
-        </p:spPr>
-        <p:txBody>
-          <a:bodyPr wrap="square" lIns="0" tIns="0" rIns="0" bIns="0" rtlCol="0" anchor="ctr"/>
-          <a:lstStyle/>
-          <a:p>
-            <a:pPr algn="l" indent="0" marL="0">
-              <a:buNone/>
-            </a:pPr>
-            <a:r>
-              <a:rPr lang="en-US" sz="900" dirty="0">
-                <a:solidFill>
-                  <a:srgbClr val="5D5D72"/>
-                </a:solidFill>
-                <a:latin typeface="Calibri" pitchFamily="34" charset="0"/>
-                <a:ea typeface="Calibri" pitchFamily="34" charset="-122"/>
-                <a:cs typeface="Calibri" pitchFamily="34" charset="-120"/>
-              </a:rPr>
-              <a:t>Usman Akram  •  COMSATS University Islamabad</a:t>
-            </a:r>
-            <a:endParaRPr lang="en-US" sz="900" dirty="0"/>
-          </a:p>
-        </p:txBody>
-      </p:sp>
-      <p:sp>
-        <p:nvSpPr>
-          <p:cNvPr id="8" name="Text 6"/>
-          <p:cNvSpPr txBox="1"/>
-          <p:nvPr/>
-        </p:nvSpPr>
-        <p:spPr>
-          <a:xfrm>
-            <a:off x="11155680" y="6446520"/>
-            <a:ext cx="457200" cy="292608"/>
-          </a:xfrm>
-          <a:prstGeom prst="rect">
-            <a:avLst/>
-          </a:prstGeom>
-          <a:noFill/>
-          <a:ln/>
-        </p:spPr>
-        <p:txBody>
-          <a:bodyPr wrap="square" lIns="0" tIns="0" rIns="0" bIns="0" rtlCol="0" anchor="ctr"/>
-          <a:lstStyle/>
-          <a:p>
-            <a:pPr algn="r" indent="0" marL="0">
-              <a:buNone/>
-            </a:pPr>
-            <a:r>
-              <a:rPr lang="en-US" sz="900" dirty="0">
-                <a:solidFill>
-                  <a:srgbClr val="5D5D72"/>
-                </a:solidFill>
-                <a:latin typeface="Calibri" pitchFamily="34" charset="0"/>
-                <a:ea typeface="Calibri" pitchFamily="34" charset="-122"/>
-                <a:cs typeface="Calibri" pitchFamily="34" charset="-120"/>
-              </a:rPr>
-              <a:t>19</a:t>
-            </a:r>
-            <a:endParaRPr lang="en-US" sz="900" dirty="0"/>
+          <p:cNvPr id="9" name="cuinotes-footer-mark"/>
+          <p:cNvSpPr txBox="1"/>
+          <p:nvPr/>
+        </p:nvSpPr>
+        <p:spPr>
+          <a:xfrm>
+            <a:off x="9951720" y="6455664"/>
+            <a:ext cx="2011680" cy="292608"/>
+          </a:xfrm>
+          <a:prstGeom prst="rect">
+            <a:avLst/>
+          </a:prstGeom>
+          <a:noFill/>
+        </p:spPr>
+        <p:txBody>
+          <a:bodyPr wrap="none" lIns="0" rIns="0" tIns="0" bIns="0">
+            <a:spAutoFit/>
+          </a:bodyPr>
+          <a:lstStyle/>
+          <a:p>
+            <a:pPr algn="r"/>
+            <a:r>
+              <a:rPr sz="1000">
+                <a:solidFill>
+                  <a:srgbClr val="8A939B"/>
+                </a:solidFill>
+                <a:hlinkClick r:id="rId3"/>
+              </a:rPr>
+              <a:t>cuinotes.com</a:t>
+            </a:r>
+            <a:r>
+              <a:rPr sz="1000">
+                <a:solidFill>
+                  <a:srgbClr val="8A939B"/>
+                </a:solidFill>
+              </a:rPr>
+              <a:t>  ·  19</a:t>
+            </a:r>
           </a:p>
         </p:txBody>
       </p:sp>
@@ -8116,6 +7839,10 @@
           </a:solidFill>
           <a:ln/>
         </p:spPr>
+        <p:txBody>
+          <a:bodyPr/>
+          <a:p/>
+        </p:txBody>
       </p:sp>
       <p:sp>
         <p:nvSpPr>
@@ -8214,6 +7941,10 @@
           </a:solidFill>
           <a:ln/>
         </p:spPr>
+        <p:txBody>
+          <a:bodyPr/>
+          <a:p/>
+        </p:txBody>
       </p:sp>
       <p:sp>
         <p:nvSpPr>
@@ -8312,6 +8043,10 @@
           </a:solidFill>
           <a:ln/>
         </p:spPr>
+        <p:txBody>
+          <a:bodyPr/>
+          <a:p/>
+        </p:txBody>
       </p:sp>
       <p:sp>
         <p:nvSpPr>
@@ -8410,6 +8145,10 @@
           </a:solidFill>
           <a:ln/>
         </p:spPr>
+        <p:txBody>
+          <a:bodyPr/>
+          <a:p/>
+        </p:txBody>
       </p:sp>
       <p:sp>
         <p:nvSpPr>
@@ -8508,6 +8247,10 @@
           </a:solidFill>
           <a:ln/>
         </p:spPr>
+        <p:txBody>
+          <a:bodyPr/>
+          <a:p/>
+        </p:txBody>
       </p:sp>
       <p:sp>
         <p:nvSpPr>
@@ -8589,79 +8332,44 @@
       </p:sp>
       <p:sp>
         <p:nvSpPr>
-          <p:cNvPr id="19" name="Text 17"/>
-          <p:cNvSpPr txBox="1"/>
-          <p:nvPr/>
-        </p:nvSpPr>
-        <p:spPr>
-          <a:xfrm>
-            <a:off x="640080" y="6446520"/>
-            <a:ext cx="8686800" cy="292608"/>
-          </a:xfrm>
-          <a:prstGeom prst="rect">
-            <a:avLst/>
-          </a:prstGeom>
-          <a:noFill/>
-          <a:ln/>
-        </p:spPr>
-        <p:txBody>
-          <a:bodyPr wrap="square" lIns="0" tIns="0" rIns="0" bIns="0" rtlCol="0" anchor="ctr"/>
-          <a:lstStyle/>
-          <a:p>
-            <a:pPr algn="l" indent="0" marL="0">
-              <a:buNone/>
-            </a:pPr>
-            <a:r>
-              <a:rPr lang="en-US" sz="900" dirty="0">
-                <a:solidFill>
-                  <a:srgbClr val="5D5D72"/>
-                </a:solidFill>
-                <a:latin typeface="Calibri" pitchFamily="34" charset="0"/>
-                <a:ea typeface="Calibri" pitchFamily="34" charset="-122"/>
-                <a:cs typeface="Calibri" pitchFamily="34" charset="-120"/>
-              </a:rPr>
-              <a:t>Usman Akram  •  COMSATS University Islamabad</a:t>
-            </a:r>
-            <a:endParaRPr lang="en-US" sz="900" dirty="0"/>
-          </a:p>
-        </p:txBody>
-      </p:sp>
-      <p:sp>
-        <p:nvSpPr>
-          <p:cNvPr id="20" name="Text 18"/>
-          <p:cNvSpPr txBox="1"/>
-          <p:nvPr/>
-        </p:nvSpPr>
-        <p:spPr>
-          <a:xfrm>
-            <a:off x="11155680" y="6446520"/>
-            <a:ext cx="457200" cy="292608"/>
-          </a:xfrm>
-          <a:prstGeom prst="rect">
-            <a:avLst/>
-          </a:prstGeom>
-          <a:noFill/>
-          <a:ln/>
-        </p:spPr>
-        <p:txBody>
-          <a:bodyPr wrap="square" lIns="0" tIns="0" rIns="0" bIns="0" rtlCol="0" anchor="ctr"/>
-          <a:lstStyle/>
-          <a:p>
-            <a:pPr algn="r" indent="0" marL="0">
-              <a:buNone/>
-            </a:pPr>
-            <a:r>
-              <a:rPr lang="en-US" sz="900" dirty="0">
-                <a:solidFill>
-                  <a:srgbClr val="5D5D72"/>
-                </a:solidFill>
-                <a:latin typeface="Calibri" pitchFamily="34" charset="0"/>
-                <a:ea typeface="Calibri" pitchFamily="34" charset="-122"/>
-                <a:cs typeface="Calibri" pitchFamily="34" charset="-120"/>
-              </a:rPr>
-              <a:t>2</a:t>
-            </a:r>
-            <a:endParaRPr lang="en-US" sz="900" dirty="0"/>
+          <p:cNvPr id="21" name="cuinotes-footer-mark"/>
+          <p:cNvSpPr txBox="1"/>
+          <p:nvPr/>
+        </p:nvSpPr>
+        <p:spPr>
+          <a:xfrm>
+            <a:off x="9951720" y="6455664"/>
+            <a:ext cx="2011680" cy="292608"/>
+          </a:xfrm>
+          <a:prstGeom prst="rect">
+            <a:avLst/>
+          </a:prstGeom>
+          <a:noFill/>
+        </p:spPr>
+        <p:txBody>
+          <a:bodyPr wrap="none" lIns="0" rIns="0" tIns="0" bIns="0">
+            <a:spAutoFit/>
+          </a:bodyPr>
+          <a:lstStyle/>
+          <a:p>
+            <a:pPr algn="r"/>
+            <a:r>
+              <a:rPr sz="1000">
+                <a:solidFill>
+                  <a:srgbClr val="8A939B"/>
+                </a:solidFill>
+                <a:hlinkClick r:id="rId3"/>
+              </a:rPr>
+              <a:t>cuinotes.com</a:t>
+            </a:r>
+            <a:r>
+              <a:rPr sz="1000">
+                <a:solidFill>
+                  <a:srgbClr val="8A939B"/>
+                </a:solidFill>
+              </a:rPr>
+              <a:t>  ·  2</a:t>
+            </a:r>
           </a:p>
         </p:txBody>
       </p:sp>
@@ -8796,6 +8504,10 @@
           </a:solidFill>
           <a:ln/>
         </p:spPr>
+        <p:txBody>
+          <a:bodyPr/>
+          <a:p/>
+        </p:txBody>
       </p:sp>
       <p:sp>
         <p:nvSpPr>
@@ -9109,79 +8821,44 @@
       </p:sp>
       <p:sp>
         <p:nvSpPr>
-          <p:cNvPr id="7" name="Text 5"/>
-          <p:cNvSpPr txBox="1"/>
-          <p:nvPr/>
-        </p:nvSpPr>
-        <p:spPr>
-          <a:xfrm>
-            <a:off x="640080" y="6446520"/>
-            <a:ext cx="8686800" cy="292608"/>
-          </a:xfrm>
-          <a:prstGeom prst="rect">
-            <a:avLst/>
-          </a:prstGeom>
-          <a:noFill/>
-          <a:ln/>
-        </p:spPr>
-        <p:txBody>
-          <a:bodyPr wrap="square" lIns="0" tIns="0" rIns="0" bIns="0" rtlCol="0" anchor="ctr"/>
-          <a:lstStyle/>
-          <a:p>
-            <a:pPr algn="l" indent="0" marL="0">
-              <a:buNone/>
-            </a:pPr>
-            <a:r>
-              <a:rPr lang="en-US" sz="900" dirty="0">
-                <a:solidFill>
-                  <a:srgbClr val="5D5D72"/>
-                </a:solidFill>
-                <a:latin typeface="Calibri" pitchFamily="34" charset="0"/>
-                <a:ea typeface="Calibri" pitchFamily="34" charset="-122"/>
-                <a:cs typeface="Calibri" pitchFamily="34" charset="-120"/>
-              </a:rPr>
-              <a:t>Usman Akram  •  COMSATS University Islamabad</a:t>
-            </a:r>
-            <a:endParaRPr lang="en-US" sz="900" dirty="0"/>
-          </a:p>
-        </p:txBody>
-      </p:sp>
-      <p:sp>
-        <p:nvSpPr>
-          <p:cNvPr id="8" name="Text 6"/>
-          <p:cNvSpPr txBox="1"/>
-          <p:nvPr/>
-        </p:nvSpPr>
-        <p:spPr>
-          <a:xfrm>
-            <a:off x="11155680" y="6446520"/>
-            <a:ext cx="457200" cy="292608"/>
-          </a:xfrm>
-          <a:prstGeom prst="rect">
-            <a:avLst/>
-          </a:prstGeom>
-          <a:noFill/>
-          <a:ln/>
-        </p:spPr>
-        <p:txBody>
-          <a:bodyPr wrap="square" lIns="0" tIns="0" rIns="0" bIns="0" rtlCol="0" anchor="ctr"/>
-          <a:lstStyle/>
-          <a:p>
-            <a:pPr algn="r" indent="0" marL="0">
-              <a:buNone/>
-            </a:pPr>
-            <a:r>
-              <a:rPr lang="en-US" sz="900" dirty="0">
-                <a:solidFill>
-                  <a:srgbClr val="5D5D72"/>
-                </a:solidFill>
-                <a:latin typeface="Calibri" pitchFamily="34" charset="0"/>
-                <a:ea typeface="Calibri" pitchFamily="34" charset="-122"/>
-                <a:cs typeface="Calibri" pitchFamily="34" charset="-120"/>
-              </a:rPr>
-              <a:t>20</a:t>
-            </a:r>
-            <a:endParaRPr lang="en-US" sz="900" dirty="0"/>
+          <p:cNvPr id="9" name="cuinotes-footer-mark"/>
+          <p:cNvSpPr txBox="1"/>
+          <p:nvPr/>
+        </p:nvSpPr>
+        <p:spPr>
+          <a:xfrm>
+            <a:off x="9951720" y="6455664"/>
+            <a:ext cx="2011680" cy="292608"/>
+          </a:xfrm>
+          <a:prstGeom prst="rect">
+            <a:avLst/>
+          </a:prstGeom>
+          <a:noFill/>
+        </p:spPr>
+        <p:txBody>
+          <a:bodyPr wrap="none" lIns="0" rIns="0" tIns="0" bIns="0">
+            <a:spAutoFit/>
+          </a:bodyPr>
+          <a:lstStyle/>
+          <a:p>
+            <a:pPr algn="r"/>
+            <a:r>
+              <a:rPr sz="1000">
+                <a:solidFill>
+                  <a:srgbClr val="8A939B"/>
+                </a:solidFill>
+                <a:hlinkClick r:id="rId3"/>
+              </a:rPr>
+              <a:t>cuinotes.com</a:t>
+            </a:r>
+            <a:r>
+              <a:rPr sz="1000">
+                <a:solidFill>
+                  <a:srgbClr val="8A939B"/>
+                </a:solidFill>
+              </a:rPr>
+              <a:t>  ·  20</a:t>
+            </a:r>
           </a:p>
         </p:txBody>
       </p:sp>
@@ -9367,6 +9044,10 @@
             </a:outerShdw>
           </a:effectLst>
         </p:spPr>
+        <p:txBody>
+          <a:bodyPr/>
+          <a:p/>
+        </p:txBody>
       </p:sp>
       <p:pic>
         <p:nvPicPr>
@@ -9464,6 +9145,10 @@
             </a:outerShdw>
           </a:effectLst>
         </p:spPr>
+        <p:txBody>
+          <a:bodyPr/>
+          <a:p/>
+        </p:txBody>
       </p:sp>
       <p:pic>
         <p:nvPicPr>
@@ -9491,79 +9176,44 @@
       </p:pic>
       <p:sp>
         <p:nvSpPr>
-          <p:cNvPr id="10" name="Text 6"/>
-          <p:cNvSpPr txBox="1"/>
-          <p:nvPr/>
-        </p:nvSpPr>
-        <p:spPr>
-          <a:xfrm>
-            <a:off x="640080" y="6446520"/>
-            <a:ext cx="8686800" cy="292608"/>
-          </a:xfrm>
-          <a:prstGeom prst="rect">
-            <a:avLst/>
-          </a:prstGeom>
-          <a:noFill/>
-          <a:ln/>
-        </p:spPr>
-        <p:txBody>
-          <a:bodyPr wrap="square" lIns="0" tIns="0" rIns="0" bIns="0" rtlCol="0" anchor="ctr"/>
-          <a:lstStyle/>
-          <a:p>
-            <a:pPr algn="l" indent="0" marL="0">
-              <a:buNone/>
-            </a:pPr>
-            <a:r>
-              <a:rPr lang="en-US" sz="900" dirty="0">
-                <a:solidFill>
-                  <a:srgbClr val="5D5D72"/>
-                </a:solidFill>
-                <a:latin typeface="Calibri" pitchFamily="34" charset="0"/>
-                <a:ea typeface="Calibri" pitchFamily="34" charset="-122"/>
-                <a:cs typeface="Calibri" pitchFamily="34" charset="-120"/>
-              </a:rPr>
-              <a:t>Usman Akram  •  COMSATS University Islamabad</a:t>
-            </a:r>
-            <a:endParaRPr lang="en-US" sz="900" dirty="0"/>
-          </a:p>
-        </p:txBody>
-      </p:sp>
-      <p:sp>
-        <p:nvSpPr>
-          <p:cNvPr id="11" name="Text 7"/>
-          <p:cNvSpPr txBox="1"/>
-          <p:nvPr/>
-        </p:nvSpPr>
-        <p:spPr>
-          <a:xfrm>
-            <a:off x="11155680" y="6446520"/>
-            <a:ext cx="457200" cy="292608"/>
-          </a:xfrm>
-          <a:prstGeom prst="rect">
-            <a:avLst/>
-          </a:prstGeom>
-          <a:noFill/>
-          <a:ln/>
-        </p:spPr>
-        <p:txBody>
-          <a:bodyPr wrap="square" lIns="0" tIns="0" rIns="0" bIns="0" rtlCol="0" anchor="ctr"/>
-          <a:lstStyle/>
-          <a:p>
-            <a:pPr algn="r" indent="0" marL="0">
-              <a:buNone/>
-            </a:pPr>
-            <a:r>
-              <a:rPr lang="en-US" sz="900" dirty="0">
-                <a:solidFill>
-                  <a:srgbClr val="5D5D72"/>
-                </a:solidFill>
-                <a:latin typeface="Calibri" pitchFamily="34" charset="0"/>
-                <a:ea typeface="Calibri" pitchFamily="34" charset="-122"/>
-                <a:cs typeface="Calibri" pitchFamily="34" charset="-120"/>
-              </a:rPr>
-              <a:t>21</a:t>
-            </a:r>
-            <a:endParaRPr lang="en-US" sz="900" dirty="0"/>
+          <p:cNvPr id="12" name="cuinotes-footer-mark"/>
+          <p:cNvSpPr txBox="1"/>
+          <p:nvPr/>
+        </p:nvSpPr>
+        <p:spPr>
+          <a:xfrm>
+            <a:off x="9951720" y="6455664"/>
+            <a:ext cx="2011680" cy="292608"/>
+          </a:xfrm>
+          <a:prstGeom prst="rect">
+            <a:avLst/>
+          </a:prstGeom>
+          <a:noFill/>
+        </p:spPr>
+        <p:txBody>
+          <a:bodyPr wrap="none" lIns="0" rIns="0" tIns="0" bIns="0">
+            <a:spAutoFit/>
+          </a:bodyPr>
+          <a:lstStyle/>
+          <a:p>
+            <a:pPr algn="r"/>
+            <a:r>
+              <a:rPr sz="1000">
+                <a:solidFill>
+                  <a:srgbClr val="8A939B"/>
+                </a:solidFill>
+                <a:hlinkClick r:id="rId5"/>
+              </a:rPr>
+              <a:t>cuinotes.com</a:t>
+            </a:r>
+            <a:r>
+              <a:rPr sz="1000">
+                <a:solidFill>
+                  <a:srgbClr val="8A939B"/>
+                </a:solidFill>
+              </a:rPr>
+              <a:t>  ·  21</a:t>
+            </a:r>
           </a:p>
         </p:txBody>
       </p:sp>
@@ -9698,6 +9348,10 @@
           </a:solidFill>
           <a:ln/>
         </p:spPr>
+        <p:txBody>
+          <a:bodyPr/>
+          <a:p/>
+        </p:txBody>
       </p:sp>
       <p:sp>
         <p:nvSpPr>
@@ -9974,6 +9628,10 @@
             </a:outerShdw>
           </a:effectLst>
         </p:spPr>
+        <p:txBody>
+          <a:bodyPr/>
+          <a:p/>
+        </p:txBody>
       </p:sp>
       <p:pic>
         <p:nvPicPr>
@@ -10001,79 +9659,44 @@
       </p:pic>
       <p:sp>
         <p:nvSpPr>
-          <p:cNvPr id="8" name="Text 5"/>
-          <p:cNvSpPr txBox="1"/>
-          <p:nvPr/>
-        </p:nvSpPr>
-        <p:spPr>
-          <a:xfrm>
-            <a:off x="640080" y="6446520"/>
-            <a:ext cx="8686800" cy="292608"/>
-          </a:xfrm>
-          <a:prstGeom prst="rect">
-            <a:avLst/>
-          </a:prstGeom>
-          <a:noFill/>
-          <a:ln/>
-        </p:spPr>
-        <p:txBody>
-          <a:bodyPr wrap="square" lIns="0" tIns="0" rIns="0" bIns="0" rtlCol="0" anchor="ctr"/>
-          <a:lstStyle/>
-          <a:p>
-            <a:pPr algn="l" indent="0" marL="0">
-              <a:buNone/>
-            </a:pPr>
-            <a:r>
-              <a:rPr lang="en-US" sz="900" dirty="0">
-                <a:solidFill>
-                  <a:srgbClr val="5D5D72"/>
-                </a:solidFill>
-                <a:latin typeface="Calibri" pitchFamily="34" charset="0"/>
-                <a:ea typeface="Calibri" pitchFamily="34" charset="-122"/>
-                <a:cs typeface="Calibri" pitchFamily="34" charset="-120"/>
-              </a:rPr>
-              <a:t>Usman Akram  •  COMSATS University Islamabad</a:t>
-            </a:r>
-            <a:endParaRPr lang="en-US" sz="900" dirty="0"/>
-          </a:p>
-        </p:txBody>
-      </p:sp>
-      <p:sp>
-        <p:nvSpPr>
-          <p:cNvPr id="9" name="Text 6"/>
-          <p:cNvSpPr txBox="1"/>
-          <p:nvPr/>
-        </p:nvSpPr>
-        <p:spPr>
-          <a:xfrm>
-            <a:off x="11155680" y="6446520"/>
-            <a:ext cx="457200" cy="292608"/>
-          </a:xfrm>
-          <a:prstGeom prst="rect">
-            <a:avLst/>
-          </a:prstGeom>
-          <a:noFill/>
-          <a:ln/>
-        </p:spPr>
-        <p:txBody>
-          <a:bodyPr wrap="square" lIns="0" tIns="0" rIns="0" bIns="0" rtlCol="0" anchor="ctr"/>
-          <a:lstStyle/>
-          <a:p>
-            <a:pPr algn="r" indent="0" marL="0">
-              <a:buNone/>
-            </a:pPr>
-            <a:r>
-              <a:rPr lang="en-US" sz="900" dirty="0">
-                <a:solidFill>
-                  <a:srgbClr val="5D5D72"/>
-                </a:solidFill>
-                <a:latin typeface="Calibri" pitchFamily="34" charset="0"/>
-                <a:ea typeface="Calibri" pitchFamily="34" charset="-122"/>
-                <a:cs typeface="Calibri" pitchFamily="34" charset="-120"/>
-              </a:rPr>
-              <a:t>22</a:t>
-            </a:r>
-            <a:endParaRPr lang="en-US" sz="900" dirty="0"/>
+          <p:cNvPr id="10" name="cuinotes-footer-mark"/>
+          <p:cNvSpPr txBox="1"/>
+          <p:nvPr/>
+        </p:nvSpPr>
+        <p:spPr>
+          <a:xfrm>
+            <a:off x="9951720" y="6455664"/>
+            <a:ext cx="2011680" cy="292608"/>
+          </a:xfrm>
+          <a:prstGeom prst="rect">
+            <a:avLst/>
+          </a:prstGeom>
+          <a:noFill/>
+        </p:spPr>
+        <p:txBody>
+          <a:bodyPr wrap="none" lIns="0" rIns="0" tIns="0" bIns="0">
+            <a:spAutoFit/>
+          </a:bodyPr>
+          <a:lstStyle/>
+          <a:p>
+            <a:pPr algn="r"/>
+            <a:r>
+              <a:rPr sz="1000">
+                <a:solidFill>
+                  <a:srgbClr val="8A939B"/>
+                </a:solidFill>
+                <a:hlinkClick r:id="rId4"/>
+              </a:rPr>
+              <a:t>cuinotes.com</a:t>
+            </a:r>
+            <a:r>
+              <a:rPr sz="1000">
+                <a:solidFill>
+                  <a:srgbClr val="8A939B"/>
+                </a:solidFill>
+              </a:rPr>
+              <a:t>  ·  22</a:t>
+            </a:r>
           </a:p>
         </p:txBody>
       </p:sp>
@@ -10213,6 +9836,10 @@
             <a:prstDash val="solid"/>
           </a:ln>
         </p:spPr>
+        <p:txBody>
+          <a:bodyPr/>
+          <a:p/>
+        </p:txBody>
       </p:sp>
       <p:sp>
         <p:nvSpPr>
@@ -10294,79 +9921,44 @@
       </p:sp>
       <p:sp>
         <p:nvSpPr>
-          <p:cNvPr id="7" name="Text 5"/>
-          <p:cNvSpPr txBox="1"/>
-          <p:nvPr/>
-        </p:nvSpPr>
-        <p:spPr>
-          <a:xfrm>
-            <a:off x="640080" y="6446520"/>
-            <a:ext cx="8686800" cy="292608"/>
-          </a:xfrm>
-          <a:prstGeom prst="rect">
-            <a:avLst/>
-          </a:prstGeom>
-          <a:noFill/>
-          <a:ln/>
-        </p:spPr>
-        <p:txBody>
-          <a:bodyPr wrap="square" lIns="0" tIns="0" rIns="0" bIns="0" rtlCol="0" anchor="ctr"/>
-          <a:lstStyle/>
-          <a:p>
-            <a:pPr algn="l" indent="0" marL="0">
-              <a:buNone/>
-            </a:pPr>
-            <a:r>
-              <a:rPr lang="en-US" sz="900" dirty="0">
-                <a:solidFill>
-                  <a:srgbClr val="5D5D72"/>
-                </a:solidFill>
-                <a:latin typeface="Calibri" pitchFamily="34" charset="0"/>
-                <a:ea typeface="Calibri" pitchFamily="34" charset="-122"/>
-                <a:cs typeface="Calibri" pitchFamily="34" charset="-120"/>
-              </a:rPr>
-              <a:t>Usman Akram  •  COMSATS University Islamabad</a:t>
-            </a:r>
-            <a:endParaRPr lang="en-US" sz="900" dirty="0"/>
-          </a:p>
-        </p:txBody>
-      </p:sp>
-      <p:sp>
-        <p:nvSpPr>
-          <p:cNvPr id="8" name="Text 6"/>
-          <p:cNvSpPr txBox="1"/>
-          <p:nvPr/>
-        </p:nvSpPr>
-        <p:spPr>
-          <a:xfrm>
-            <a:off x="11155680" y="6446520"/>
-            <a:ext cx="457200" cy="292608"/>
-          </a:xfrm>
-          <a:prstGeom prst="rect">
-            <a:avLst/>
-          </a:prstGeom>
-          <a:noFill/>
-          <a:ln/>
-        </p:spPr>
-        <p:txBody>
-          <a:bodyPr wrap="square" lIns="0" tIns="0" rIns="0" bIns="0" rtlCol="0" anchor="ctr"/>
-          <a:lstStyle/>
-          <a:p>
-            <a:pPr algn="r" indent="0" marL="0">
-              <a:buNone/>
-            </a:pPr>
-            <a:r>
-              <a:rPr lang="en-US" sz="900" dirty="0">
-                <a:solidFill>
-                  <a:srgbClr val="5D5D72"/>
-                </a:solidFill>
-                <a:latin typeface="Calibri" pitchFamily="34" charset="0"/>
-                <a:ea typeface="Calibri" pitchFamily="34" charset="-122"/>
-                <a:cs typeface="Calibri" pitchFamily="34" charset="-120"/>
-              </a:rPr>
-              <a:t>23</a:t>
-            </a:r>
-            <a:endParaRPr lang="en-US" sz="900" dirty="0"/>
+          <p:cNvPr id="9" name="cuinotes-footer-mark"/>
+          <p:cNvSpPr txBox="1"/>
+          <p:nvPr/>
+        </p:nvSpPr>
+        <p:spPr>
+          <a:xfrm>
+            <a:off x="9951720" y="6455664"/>
+            <a:ext cx="2011680" cy="292608"/>
+          </a:xfrm>
+          <a:prstGeom prst="rect">
+            <a:avLst/>
+          </a:prstGeom>
+          <a:noFill/>
+        </p:spPr>
+        <p:txBody>
+          <a:bodyPr wrap="none" lIns="0" rIns="0" tIns="0" bIns="0">
+            <a:spAutoFit/>
+          </a:bodyPr>
+          <a:lstStyle/>
+          <a:p>
+            <a:pPr algn="r"/>
+            <a:r>
+              <a:rPr sz="1000">
+                <a:solidFill>
+                  <a:srgbClr val="8A939B"/>
+                </a:solidFill>
+                <a:hlinkClick r:id="rId3"/>
+              </a:rPr>
+              <a:t>cuinotes.com</a:t>
+            </a:r>
+            <a:r>
+              <a:rPr sz="1000">
+                <a:solidFill>
+                  <a:srgbClr val="8A939B"/>
+                </a:solidFill>
+              </a:rPr>
+              <a:t>  ·  23</a:t>
+            </a:r>
           </a:p>
         </p:txBody>
       </p:sp>
@@ -11543,79 +11135,44 @@
       </p:graphicFrame>
       <p:sp>
         <p:nvSpPr>
-          <p:cNvPr id="5" name="Text 2"/>
-          <p:cNvSpPr txBox="1"/>
-          <p:nvPr/>
-        </p:nvSpPr>
-        <p:spPr>
-          <a:xfrm>
-            <a:off x="640080" y="6446520"/>
-            <a:ext cx="8686800" cy="292608"/>
-          </a:xfrm>
-          <a:prstGeom prst="rect">
-            <a:avLst/>
-          </a:prstGeom>
-          <a:noFill/>
-          <a:ln/>
-        </p:spPr>
-        <p:txBody>
-          <a:bodyPr wrap="square" lIns="0" tIns="0" rIns="0" bIns="0" rtlCol="0" anchor="ctr"/>
-          <a:lstStyle/>
-          <a:p>
-            <a:pPr algn="l" indent="0" marL="0">
-              <a:buNone/>
-            </a:pPr>
-            <a:r>
-              <a:rPr lang="en-US" sz="900" dirty="0">
-                <a:solidFill>
-                  <a:srgbClr val="5D5D72"/>
-                </a:solidFill>
-                <a:latin typeface="Calibri" pitchFamily="34" charset="0"/>
-                <a:ea typeface="Calibri" pitchFamily="34" charset="-122"/>
-                <a:cs typeface="Calibri" pitchFamily="34" charset="-120"/>
-              </a:rPr>
-              <a:t>Usman Akram  •  COMSATS University Islamabad</a:t>
-            </a:r>
-            <a:endParaRPr lang="en-US" sz="900" dirty="0"/>
-          </a:p>
-        </p:txBody>
-      </p:sp>
-      <p:sp>
-        <p:nvSpPr>
-          <p:cNvPr id="6" name="Text 3"/>
-          <p:cNvSpPr txBox="1"/>
-          <p:nvPr/>
-        </p:nvSpPr>
-        <p:spPr>
-          <a:xfrm>
-            <a:off x="11155680" y="6446520"/>
-            <a:ext cx="457200" cy="292608"/>
-          </a:xfrm>
-          <a:prstGeom prst="rect">
-            <a:avLst/>
-          </a:prstGeom>
-          <a:noFill/>
-          <a:ln/>
-        </p:spPr>
-        <p:txBody>
-          <a:bodyPr wrap="square" lIns="0" tIns="0" rIns="0" bIns="0" rtlCol="0" anchor="ctr"/>
-          <a:lstStyle/>
-          <a:p>
-            <a:pPr algn="r" indent="0" marL="0">
-              <a:buNone/>
-            </a:pPr>
-            <a:r>
-              <a:rPr lang="en-US" sz="900" dirty="0">
-                <a:solidFill>
-                  <a:srgbClr val="5D5D72"/>
-                </a:solidFill>
-                <a:latin typeface="Calibri" pitchFamily="34" charset="0"/>
-                <a:ea typeface="Calibri" pitchFamily="34" charset="-122"/>
-                <a:cs typeface="Calibri" pitchFamily="34" charset="-120"/>
-              </a:rPr>
-              <a:t>24</a:t>
-            </a:r>
-            <a:endParaRPr lang="en-US" sz="900" dirty="0"/>
+          <p:cNvPr id="26" name="cuinotes-footer-mark"/>
+          <p:cNvSpPr txBox="1"/>
+          <p:nvPr/>
+        </p:nvSpPr>
+        <p:spPr>
+          <a:xfrm>
+            <a:off x="9951720" y="6455664"/>
+            <a:ext cx="2011680" cy="292608"/>
+          </a:xfrm>
+          <a:prstGeom prst="rect">
+            <a:avLst/>
+          </a:prstGeom>
+          <a:noFill/>
+        </p:spPr>
+        <p:txBody>
+          <a:bodyPr wrap="none" lIns="0" rIns="0" tIns="0" bIns="0">
+            <a:spAutoFit/>
+          </a:bodyPr>
+          <a:lstStyle/>
+          <a:p>
+            <a:pPr algn="r"/>
+            <a:r>
+              <a:rPr sz="1000">
+                <a:solidFill>
+                  <a:srgbClr val="8A939B"/>
+                </a:solidFill>
+                <a:hlinkClick r:id="rId3"/>
+              </a:rPr>
+              <a:t>cuinotes.com</a:t>
+            </a:r>
+            <a:r>
+              <a:rPr sz="1000">
+                <a:solidFill>
+                  <a:srgbClr val="8A939B"/>
+                </a:solidFill>
+              </a:rPr>
+              <a:t>  ·  24</a:t>
+            </a:r>
           </a:p>
         </p:txBody>
       </p:sp>
@@ -11748,6 +11305,10 @@
           </a:solidFill>
           <a:ln/>
         </p:spPr>
+        <p:txBody>
+          <a:bodyPr/>
+          <a:p/>
+        </p:txBody>
       </p:sp>
       <p:sp>
         <p:nvSpPr>
@@ -11846,6 +11407,10 @@
           </a:solidFill>
           <a:ln/>
         </p:spPr>
+        <p:txBody>
+          <a:bodyPr/>
+          <a:p/>
+        </p:txBody>
       </p:sp>
       <p:sp>
         <p:nvSpPr>
@@ -11944,6 +11509,10 @@
           </a:solidFill>
           <a:ln/>
         </p:spPr>
+        <p:txBody>
+          <a:bodyPr/>
+          <a:p/>
+        </p:txBody>
       </p:sp>
       <p:sp>
         <p:nvSpPr>
@@ -12025,79 +11594,44 @@
       </p:sp>
       <p:sp>
         <p:nvSpPr>
-          <p:cNvPr id="13" name="Text 11"/>
-          <p:cNvSpPr txBox="1"/>
-          <p:nvPr/>
-        </p:nvSpPr>
-        <p:spPr>
-          <a:xfrm>
-            <a:off x="640080" y="6446520"/>
-            <a:ext cx="8686800" cy="292608"/>
-          </a:xfrm>
-          <a:prstGeom prst="rect">
-            <a:avLst/>
-          </a:prstGeom>
-          <a:noFill/>
-          <a:ln/>
-        </p:spPr>
-        <p:txBody>
-          <a:bodyPr wrap="square" lIns="0" tIns="0" rIns="0" bIns="0" rtlCol="0" anchor="ctr"/>
-          <a:lstStyle/>
-          <a:p>
-            <a:pPr algn="l" indent="0" marL="0">
-              <a:buNone/>
-            </a:pPr>
-            <a:r>
-              <a:rPr lang="en-US" sz="900" dirty="0">
-                <a:solidFill>
-                  <a:srgbClr val="5D5D72"/>
-                </a:solidFill>
-                <a:latin typeface="Calibri" pitchFamily="34" charset="0"/>
-                <a:ea typeface="Calibri" pitchFamily="34" charset="-122"/>
-                <a:cs typeface="Calibri" pitchFamily="34" charset="-120"/>
-              </a:rPr>
-              <a:t>Usman Akram  •  COMSATS University Islamabad</a:t>
-            </a:r>
-            <a:endParaRPr lang="en-US" sz="900" dirty="0"/>
-          </a:p>
-        </p:txBody>
-      </p:sp>
-      <p:sp>
-        <p:nvSpPr>
-          <p:cNvPr id="14" name="Text 12"/>
-          <p:cNvSpPr txBox="1"/>
-          <p:nvPr/>
-        </p:nvSpPr>
-        <p:spPr>
-          <a:xfrm>
-            <a:off x="11155680" y="6446520"/>
-            <a:ext cx="457200" cy="292608"/>
-          </a:xfrm>
-          <a:prstGeom prst="rect">
-            <a:avLst/>
-          </a:prstGeom>
-          <a:noFill/>
-          <a:ln/>
-        </p:spPr>
-        <p:txBody>
-          <a:bodyPr wrap="square" lIns="0" tIns="0" rIns="0" bIns="0" rtlCol="0" anchor="ctr"/>
-          <a:lstStyle/>
-          <a:p>
-            <a:pPr algn="r" indent="0" marL="0">
-              <a:buNone/>
-            </a:pPr>
-            <a:r>
-              <a:rPr lang="en-US" sz="900" dirty="0">
-                <a:solidFill>
-                  <a:srgbClr val="5D5D72"/>
-                </a:solidFill>
-                <a:latin typeface="Calibri" pitchFamily="34" charset="0"/>
-                <a:ea typeface="Calibri" pitchFamily="34" charset="-122"/>
-                <a:cs typeface="Calibri" pitchFamily="34" charset="-120"/>
-              </a:rPr>
-              <a:t>25</a:t>
-            </a:r>
-            <a:endParaRPr lang="en-US" sz="900" dirty="0"/>
+          <p:cNvPr id="15" name="cuinotes-footer-mark"/>
+          <p:cNvSpPr txBox="1"/>
+          <p:nvPr/>
+        </p:nvSpPr>
+        <p:spPr>
+          <a:xfrm>
+            <a:off x="9951720" y="6455664"/>
+            <a:ext cx="2011680" cy="292608"/>
+          </a:xfrm>
+          <a:prstGeom prst="rect">
+            <a:avLst/>
+          </a:prstGeom>
+          <a:noFill/>
+        </p:spPr>
+        <p:txBody>
+          <a:bodyPr wrap="none" lIns="0" rIns="0" tIns="0" bIns="0">
+            <a:spAutoFit/>
+          </a:bodyPr>
+          <a:lstStyle/>
+          <a:p>
+            <a:pPr algn="r"/>
+            <a:r>
+              <a:rPr sz="1000">
+                <a:solidFill>
+                  <a:srgbClr val="8A939B"/>
+                </a:solidFill>
+                <a:hlinkClick r:id="rId3"/>
+              </a:rPr>
+              <a:t>cuinotes.com</a:t>
+            </a:r>
+            <a:r>
+              <a:rPr sz="1000">
+                <a:solidFill>
+                  <a:srgbClr val="8A939B"/>
+                </a:solidFill>
+              </a:rPr>
+              <a:t>  ·  25</a:t>
+            </a:r>
           </a:p>
         </p:txBody>
       </p:sp>
@@ -12232,6 +11766,10 @@
           </a:solidFill>
           <a:ln/>
         </p:spPr>
+        <p:txBody>
+          <a:bodyPr/>
+          <a:p/>
+        </p:txBody>
       </p:sp>
       <p:sp>
         <p:nvSpPr>
@@ -12312,6 +11850,10 @@
             <a:tailEnd type="triangle"/>
           </a:ln>
         </p:spPr>
+        <p:txBody>
+          <a:bodyPr/>
+          <a:p/>
+        </p:txBody>
       </p:sp>
       <p:sp>
         <p:nvSpPr>
@@ -12334,6 +11876,10 @@
           </a:solidFill>
           <a:ln/>
         </p:spPr>
+        <p:txBody>
+          <a:bodyPr/>
+          <a:p/>
+        </p:txBody>
       </p:sp>
       <p:sp>
         <p:nvSpPr>
@@ -12414,6 +11960,10 @@
             <a:tailEnd type="triangle"/>
           </a:ln>
         </p:spPr>
+        <p:txBody>
+          <a:bodyPr/>
+          <a:p/>
+        </p:txBody>
       </p:sp>
       <p:sp>
         <p:nvSpPr>
@@ -12436,6 +11986,10 @@
           </a:solidFill>
           <a:ln/>
         </p:spPr>
+        <p:txBody>
+          <a:bodyPr/>
+          <a:p/>
+        </p:txBody>
       </p:sp>
       <p:sp>
         <p:nvSpPr>
@@ -12516,6 +12070,10 @@
             <a:tailEnd type="triangle"/>
           </a:ln>
         </p:spPr>
+        <p:txBody>
+          <a:bodyPr/>
+          <a:p/>
+        </p:txBody>
       </p:sp>
       <p:sp>
         <p:nvSpPr>
@@ -12538,6 +12096,10 @@
           </a:solidFill>
           <a:ln/>
         </p:spPr>
+        <p:txBody>
+          <a:bodyPr/>
+          <a:p/>
+        </p:txBody>
       </p:sp>
       <p:sp>
         <p:nvSpPr>
@@ -12618,6 +12180,10 @@
             <a:tailEnd type="triangle"/>
           </a:ln>
         </p:spPr>
+        <p:txBody>
+          <a:bodyPr/>
+          <a:p/>
+        </p:txBody>
       </p:sp>
       <p:sp>
         <p:nvSpPr>
@@ -12640,6 +12206,10 @@
           </a:solidFill>
           <a:ln/>
         </p:spPr>
+        <p:txBody>
+          <a:bodyPr/>
+          <a:p/>
+        </p:txBody>
       </p:sp>
       <p:sp>
         <p:nvSpPr>
@@ -12738,79 +12308,44 @@
       </p:sp>
       <p:sp>
         <p:nvSpPr>
-          <p:cNvPr id="19" name="Text 17"/>
-          <p:cNvSpPr txBox="1"/>
-          <p:nvPr/>
-        </p:nvSpPr>
-        <p:spPr>
-          <a:xfrm>
-            <a:off x="640080" y="6446520"/>
-            <a:ext cx="8686800" cy="292608"/>
-          </a:xfrm>
-          <a:prstGeom prst="rect">
-            <a:avLst/>
-          </a:prstGeom>
-          <a:noFill/>
-          <a:ln/>
-        </p:spPr>
-        <p:txBody>
-          <a:bodyPr wrap="square" lIns="0" tIns="0" rIns="0" bIns="0" rtlCol="0" anchor="ctr"/>
-          <a:lstStyle/>
-          <a:p>
-            <a:pPr algn="l" indent="0" marL="0">
-              <a:buNone/>
-            </a:pPr>
-            <a:r>
-              <a:rPr lang="en-US" sz="900" dirty="0">
-                <a:solidFill>
-                  <a:srgbClr val="5D5D72"/>
-                </a:solidFill>
-                <a:latin typeface="Calibri" pitchFamily="34" charset="0"/>
-                <a:ea typeface="Calibri" pitchFamily="34" charset="-122"/>
-                <a:cs typeface="Calibri" pitchFamily="34" charset="-120"/>
-              </a:rPr>
-              <a:t>Usman Akram  •  COMSATS University Islamabad</a:t>
-            </a:r>
-            <a:endParaRPr lang="en-US" sz="900" dirty="0"/>
-          </a:p>
-        </p:txBody>
-      </p:sp>
-      <p:sp>
-        <p:nvSpPr>
-          <p:cNvPr id="20" name="Text 18"/>
-          <p:cNvSpPr txBox="1"/>
-          <p:nvPr/>
-        </p:nvSpPr>
-        <p:spPr>
-          <a:xfrm>
-            <a:off x="11155680" y="6446520"/>
-            <a:ext cx="457200" cy="292608"/>
-          </a:xfrm>
-          <a:prstGeom prst="rect">
-            <a:avLst/>
-          </a:prstGeom>
-          <a:noFill/>
-          <a:ln/>
-        </p:spPr>
-        <p:txBody>
-          <a:bodyPr wrap="square" lIns="0" tIns="0" rIns="0" bIns="0" rtlCol="0" anchor="ctr"/>
-          <a:lstStyle/>
-          <a:p>
-            <a:pPr algn="r" indent="0" marL="0">
-              <a:buNone/>
-            </a:pPr>
-            <a:r>
-              <a:rPr lang="en-US" sz="900" dirty="0">
-                <a:solidFill>
-                  <a:srgbClr val="5D5D72"/>
-                </a:solidFill>
-                <a:latin typeface="Calibri" pitchFamily="34" charset="0"/>
-                <a:ea typeface="Calibri" pitchFamily="34" charset="-122"/>
-                <a:cs typeface="Calibri" pitchFamily="34" charset="-120"/>
-              </a:rPr>
-              <a:t>26</a:t>
-            </a:r>
-            <a:endParaRPr lang="en-US" sz="900" dirty="0"/>
+          <p:cNvPr id="21" name="cuinotes-footer-mark"/>
+          <p:cNvSpPr txBox="1"/>
+          <p:nvPr/>
+        </p:nvSpPr>
+        <p:spPr>
+          <a:xfrm>
+            <a:off x="9951720" y="6455664"/>
+            <a:ext cx="2011680" cy="292608"/>
+          </a:xfrm>
+          <a:prstGeom prst="rect">
+            <a:avLst/>
+          </a:prstGeom>
+          <a:noFill/>
+        </p:spPr>
+        <p:txBody>
+          <a:bodyPr wrap="none" lIns="0" rIns="0" tIns="0" bIns="0">
+            <a:spAutoFit/>
+          </a:bodyPr>
+          <a:lstStyle/>
+          <a:p>
+            <a:pPr algn="r"/>
+            <a:r>
+              <a:rPr sz="1000">
+                <a:solidFill>
+                  <a:srgbClr val="8A939B"/>
+                </a:solidFill>
+                <a:hlinkClick r:id="rId3"/>
+              </a:rPr>
+              <a:t>cuinotes.com</a:t>
+            </a:r>
+            <a:r>
+              <a:rPr sz="1000">
+                <a:solidFill>
+                  <a:srgbClr val="8A939B"/>
+                </a:solidFill>
+              </a:rPr>
+              <a:t>  ·  26</a:t>
+            </a:r>
           </a:p>
         </p:txBody>
       </p:sp>
@@ -12950,6 +12485,10 @@
             <a:prstDash val="solid"/>
           </a:ln>
         </p:spPr>
+        <p:txBody>
+          <a:bodyPr/>
+          <a:p/>
+        </p:txBody>
       </p:sp>
       <p:sp>
         <p:nvSpPr>
@@ -13031,79 +12570,44 @@
       </p:sp>
       <p:sp>
         <p:nvSpPr>
-          <p:cNvPr id="7" name="Text 5"/>
-          <p:cNvSpPr txBox="1"/>
-          <p:nvPr/>
-        </p:nvSpPr>
-        <p:spPr>
-          <a:xfrm>
-            <a:off x="640080" y="6446520"/>
-            <a:ext cx="8686800" cy="292608"/>
-          </a:xfrm>
-          <a:prstGeom prst="rect">
-            <a:avLst/>
-          </a:prstGeom>
-          <a:noFill/>
-          <a:ln/>
-        </p:spPr>
-        <p:txBody>
-          <a:bodyPr wrap="square" lIns="0" tIns="0" rIns="0" bIns="0" rtlCol="0" anchor="ctr"/>
-          <a:lstStyle/>
-          <a:p>
-            <a:pPr algn="l" indent="0" marL="0">
-              <a:buNone/>
-            </a:pPr>
-            <a:r>
-              <a:rPr lang="en-US" sz="900" dirty="0">
-                <a:solidFill>
-                  <a:srgbClr val="5D5D72"/>
-                </a:solidFill>
-                <a:latin typeface="Calibri" pitchFamily="34" charset="0"/>
-                <a:ea typeface="Calibri" pitchFamily="34" charset="-122"/>
-                <a:cs typeface="Calibri" pitchFamily="34" charset="-120"/>
-              </a:rPr>
-              <a:t>Usman Akram  •  COMSATS University Islamabad</a:t>
-            </a:r>
-            <a:endParaRPr lang="en-US" sz="900" dirty="0"/>
-          </a:p>
-        </p:txBody>
-      </p:sp>
-      <p:sp>
-        <p:nvSpPr>
-          <p:cNvPr id="8" name="Text 6"/>
-          <p:cNvSpPr txBox="1"/>
-          <p:nvPr/>
-        </p:nvSpPr>
-        <p:spPr>
-          <a:xfrm>
-            <a:off x="11155680" y="6446520"/>
-            <a:ext cx="457200" cy="292608"/>
-          </a:xfrm>
-          <a:prstGeom prst="rect">
-            <a:avLst/>
-          </a:prstGeom>
-          <a:noFill/>
-          <a:ln/>
-        </p:spPr>
-        <p:txBody>
-          <a:bodyPr wrap="square" lIns="0" tIns="0" rIns="0" bIns="0" rtlCol="0" anchor="ctr"/>
-          <a:lstStyle/>
-          <a:p>
-            <a:pPr algn="r" indent="0" marL="0">
-              <a:buNone/>
-            </a:pPr>
-            <a:r>
-              <a:rPr lang="en-US" sz="900" dirty="0">
-                <a:solidFill>
-                  <a:srgbClr val="5D5D72"/>
-                </a:solidFill>
-                <a:latin typeface="Calibri" pitchFamily="34" charset="0"/>
-                <a:ea typeface="Calibri" pitchFamily="34" charset="-122"/>
-                <a:cs typeface="Calibri" pitchFamily="34" charset="-120"/>
-              </a:rPr>
-              <a:t>27</a:t>
-            </a:r>
-            <a:endParaRPr lang="en-US" sz="900" dirty="0"/>
+          <p:cNvPr id="9" name="cuinotes-footer-mark"/>
+          <p:cNvSpPr txBox="1"/>
+          <p:nvPr/>
+        </p:nvSpPr>
+        <p:spPr>
+          <a:xfrm>
+            <a:off x="9951720" y="6455664"/>
+            <a:ext cx="2011680" cy="292608"/>
+          </a:xfrm>
+          <a:prstGeom prst="rect">
+            <a:avLst/>
+          </a:prstGeom>
+          <a:noFill/>
+        </p:spPr>
+        <p:txBody>
+          <a:bodyPr wrap="none" lIns="0" rIns="0" tIns="0" bIns="0">
+            <a:spAutoFit/>
+          </a:bodyPr>
+          <a:lstStyle/>
+          <a:p>
+            <a:pPr algn="r"/>
+            <a:r>
+              <a:rPr sz="1000">
+                <a:solidFill>
+                  <a:srgbClr val="8A939B"/>
+                </a:solidFill>
+                <a:hlinkClick r:id="rId3"/>
+              </a:rPr>
+              <a:t>cuinotes.com</a:t>
+            </a:r>
+            <a:r>
+              <a:rPr sz="1000">
+                <a:solidFill>
+                  <a:srgbClr val="8A939B"/>
+                </a:solidFill>
+              </a:rPr>
+              <a:t>  ·  27</a:t>
+            </a:r>
           </a:p>
         </p:txBody>
       </p:sp>
@@ -13236,6 +12740,10 @@
           </a:solidFill>
           <a:ln/>
         </p:spPr>
+        <p:txBody>
+          <a:bodyPr/>
+          <a:p/>
+        </p:txBody>
       </p:sp>
       <p:sp>
         <p:nvSpPr>
@@ -13334,6 +12842,10 @@
           </a:solidFill>
           <a:ln/>
         </p:spPr>
+        <p:txBody>
+          <a:bodyPr/>
+          <a:p/>
+        </p:txBody>
       </p:sp>
       <p:sp>
         <p:nvSpPr>
@@ -13432,6 +12944,10 @@
           </a:solidFill>
           <a:ln/>
         </p:spPr>
+        <p:txBody>
+          <a:bodyPr/>
+          <a:p/>
+        </p:txBody>
       </p:sp>
       <p:sp>
         <p:nvSpPr>
@@ -13530,6 +13046,10 @@
           </a:solidFill>
           <a:ln/>
         </p:spPr>
+        <p:txBody>
+          <a:bodyPr/>
+          <a:p/>
+        </p:txBody>
       </p:sp>
       <p:sp>
         <p:nvSpPr>
@@ -13628,6 +13148,10 @@
           </a:solidFill>
           <a:ln/>
         </p:spPr>
+        <p:txBody>
+          <a:bodyPr/>
+          <a:p/>
+        </p:txBody>
       </p:sp>
       <p:sp>
         <p:nvSpPr>
@@ -13726,6 +13250,10 @@
           </a:solidFill>
           <a:ln/>
         </p:spPr>
+        <p:txBody>
+          <a:bodyPr/>
+          <a:p/>
+        </p:txBody>
       </p:sp>
       <p:sp>
         <p:nvSpPr>
@@ -13807,79 +13335,44 @@
       </p:sp>
       <p:sp>
         <p:nvSpPr>
-          <p:cNvPr id="22" name="Text 20"/>
-          <p:cNvSpPr txBox="1"/>
-          <p:nvPr/>
-        </p:nvSpPr>
-        <p:spPr>
-          <a:xfrm>
-            <a:off x="640080" y="6446520"/>
-            <a:ext cx="8686800" cy="292608"/>
-          </a:xfrm>
-          <a:prstGeom prst="rect">
-            <a:avLst/>
-          </a:prstGeom>
-          <a:noFill/>
-          <a:ln/>
-        </p:spPr>
-        <p:txBody>
-          <a:bodyPr wrap="square" lIns="0" tIns="0" rIns="0" bIns="0" rtlCol="0" anchor="ctr"/>
-          <a:lstStyle/>
-          <a:p>
-            <a:pPr algn="l" indent="0" marL="0">
-              <a:buNone/>
-            </a:pPr>
-            <a:r>
-              <a:rPr lang="en-US" sz="900" dirty="0">
-                <a:solidFill>
-                  <a:srgbClr val="9AA3D8"/>
-                </a:solidFill>
-                <a:latin typeface="Calibri" pitchFamily="34" charset="0"/>
-                <a:ea typeface="Calibri" pitchFamily="34" charset="-122"/>
-                <a:cs typeface="Calibri" pitchFamily="34" charset="-120"/>
-              </a:rPr>
-              <a:t>Usman Akram  •  COMSATS University Islamabad</a:t>
-            </a:r>
-            <a:endParaRPr lang="en-US" sz="900" dirty="0"/>
-          </a:p>
-        </p:txBody>
-      </p:sp>
-      <p:sp>
-        <p:nvSpPr>
-          <p:cNvPr id="23" name="Text 21"/>
-          <p:cNvSpPr txBox="1"/>
-          <p:nvPr/>
-        </p:nvSpPr>
-        <p:spPr>
-          <a:xfrm>
-            <a:off x="11155680" y="6446520"/>
-            <a:ext cx="457200" cy="292608"/>
-          </a:xfrm>
-          <a:prstGeom prst="rect">
-            <a:avLst/>
-          </a:prstGeom>
-          <a:noFill/>
-          <a:ln/>
-        </p:spPr>
-        <p:txBody>
-          <a:bodyPr wrap="square" lIns="0" tIns="0" rIns="0" bIns="0" rtlCol="0" anchor="ctr"/>
-          <a:lstStyle/>
-          <a:p>
-            <a:pPr algn="r" indent="0" marL="0">
-              <a:buNone/>
-            </a:pPr>
-            <a:r>
-              <a:rPr lang="en-US" sz="900" dirty="0">
-                <a:solidFill>
-                  <a:srgbClr val="9AA3D8"/>
-                </a:solidFill>
-                <a:latin typeface="Calibri" pitchFamily="34" charset="0"/>
-                <a:ea typeface="Calibri" pitchFamily="34" charset="-122"/>
-                <a:cs typeface="Calibri" pitchFamily="34" charset="-120"/>
-              </a:rPr>
-              <a:t>28</a:t>
-            </a:r>
-            <a:endParaRPr lang="en-US" sz="900" dirty="0"/>
+          <p:cNvPr id="24" name="cuinotes-footer-mark"/>
+          <p:cNvSpPr txBox="1"/>
+          <p:nvPr/>
+        </p:nvSpPr>
+        <p:spPr>
+          <a:xfrm>
+            <a:off x="9951720" y="6455664"/>
+            <a:ext cx="2011680" cy="292608"/>
+          </a:xfrm>
+          <a:prstGeom prst="rect">
+            <a:avLst/>
+          </a:prstGeom>
+          <a:noFill/>
+        </p:spPr>
+        <p:txBody>
+          <a:bodyPr wrap="none" lIns="0" rIns="0" tIns="0" bIns="0">
+            <a:spAutoFit/>
+          </a:bodyPr>
+          <a:lstStyle/>
+          <a:p>
+            <a:pPr algn="r"/>
+            <a:r>
+              <a:rPr sz="1000">
+                <a:solidFill>
+                  <a:srgbClr val="8A939B"/>
+                </a:solidFill>
+                <a:hlinkClick r:id="rId3"/>
+              </a:rPr>
+              <a:t>cuinotes.com</a:t>
+            </a:r>
+            <a:r>
+              <a:rPr sz="1000">
+                <a:solidFill>
+                  <a:srgbClr val="8A939B"/>
+                </a:solidFill>
+              </a:rPr>
+              <a:t>  ·  28</a:t>
+            </a:r>
           </a:p>
         </p:txBody>
       </p:sp>
@@ -14012,6 +13505,10 @@
           </a:solidFill>
           <a:ln/>
         </p:spPr>
+        <p:txBody>
+          <a:bodyPr/>
+          <a:p/>
+        </p:txBody>
       </p:sp>
       <p:sp>
         <p:nvSpPr>
@@ -14110,6 +13607,10 @@
           </a:solidFill>
           <a:ln/>
         </p:spPr>
+        <p:txBody>
+          <a:bodyPr/>
+          <a:p/>
+        </p:txBody>
       </p:sp>
       <p:sp>
         <p:nvSpPr>
@@ -14208,6 +13709,10 @@
           </a:solidFill>
           <a:ln/>
         </p:spPr>
+        <p:txBody>
+          <a:bodyPr/>
+          <a:p/>
+        </p:txBody>
       </p:sp>
       <p:sp>
         <p:nvSpPr>
@@ -14306,6 +13811,10 @@
           </a:solidFill>
           <a:ln/>
         </p:spPr>
+        <p:txBody>
+          <a:bodyPr/>
+          <a:p/>
+        </p:txBody>
       </p:sp>
       <p:sp>
         <p:nvSpPr>
@@ -14387,79 +13896,44 @@
       </p:sp>
       <p:sp>
         <p:nvSpPr>
-          <p:cNvPr id="16" name="Text 14"/>
-          <p:cNvSpPr txBox="1"/>
-          <p:nvPr/>
-        </p:nvSpPr>
-        <p:spPr>
-          <a:xfrm>
-            <a:off x="640080" y="6446520"/>
-            <a:ext cx="8686800" cy="292608"/>
-          </a:xfrm>
-          <a:prstGeom prst="rect">
-            <a:avLst/>
-          </a:prstGeom>
-          <a:noFill/>
-          <a:ln/>
-        </p:spPr>
-        <p:txBody>
-          <a:bodyPr wrap="square" lIns="0" tIns="0" rIns="0" bIns="0" rtlCol="0" anchor="ctr"/>
-          <a:lstStyle/>
-          <a:p>
-            <a:pPr algn="l" indent="0" marL="0">
-              <a:buNone/>
-            </a:pPr>
-            <a:r>
-              <a:rPr lang="en-US" sz="900" dirty="0">
-                <a:solidFill>
-                  <a:srgbClr val="5D5D72"/>
-                </a:solidFill>
-                <a:latin typeface="Calibri" pitchFamily="34" charset="0"/>
-                <a:ea typeface="Calibri" pitchFamily="34" charset="-122"/>
-                <a:cs typeface="Calibri" pitchFamily="34" charset="-120"/>
-              </a:rPr>
-              <a:t>Usman Akram  •  COMSATS University Islamabad</a:t>
-            </a:r>
-            <a:endParaRPr lang="en-US" sz="900" dirty="0"/>
-          </a:p>
-        </p:txBody>
-      </p:sp>
-      <p:sp>
-        <p:nvSpPr>
-          <p:cNvPr id="17" name="Text 15"/>
-          <p:cNvSpPr txBox="1"/>
-          <p:nvPr/>
-        </p:nvSpPr>
-        <p:spPr>
-          <a:xfrm>
-            <a:off x="11155680" y="6446520"/>
-            <a:ext cx="457200" cy="292608"/>
-          </a:xfrm>
-          <a:prstGeom prst="rect">
-            <a:avLst/>
-          </a:prstGeom>
-          <a:noFill/>
-          <a:ln/>
-        </p:spPr>
-        <p:txBody>
-          <a:bodyPr wrap="square" lIns="0" tIns="0" rIns="0" bIns="0" rtlCol="0" anchor="ctr"/>
-          <a:lstStyle/>
-          <a:p>
-            <a:pPr algn="r" indent="0" marL="0">
-              <a:buNone/>
-            </a:pPr>
-            <a:r>
-              <a:rPr lang="en-US" sz="900" dirty="0">
-                <a:solidFill>
-                  <a:srgbClr val="5D5D72"/>
-                </a:solidFill>
-                <a:latin typeface="Calibri" pitchFamily="34" charset="0"/>
-                <a:ea typeface="Calibri" pitchFamily="34" charset="-122"/>
-                <a:cs typeface="Calibri" pitchFamily="34" charset="-120"/>
-              </a:rPr>
-              <a:t>3</a:t>
-            </a:r>
-            <a:endParaRPr lang="en-US" sz="900" dirty="0"/>
+          <p:cNvPr id="18" name="cuinotes-footer-mark"/>
+          <p:cNvSpPr txBox="1"/>
+          <p:nvPr/>
+        </p:nvSpPr>
+        <p:spPr>
+          <a:xfrm>
+            <a:off x="9951720" y="6455664"/>
+            <a:ext cx="2011680" cy="292608"/>
+          </a:xfrm>
+          <a:prstGeom prst="rect">
+            <a:avLst/>
+          </a:prstGeom>
+          <a:noFill/>
+        </p:spPr>
+        <p:txBody>
+          <a:bodyPr wrap="none" lIns="0" rIns="0" tIns="0" bIns="0">
+            <a:spAutoFit/>
+          </a:bodyPr>
+          <a:lstStyle/>
+          <a:p>
+            <a:pPr algn="r"/>
+            <a:r>
+              <a:rPr sz="1000">
+                <a:solidFill>
+                  <a:srgbClr val="8A939B"/>
+                </a:solidFill>
+                <a:hlinkClick r:id="rId3"/>
+              </a:rPr>
+              <a:t>cuinotes.com</a:t>
+            </a:r>
+            <a:r>
+              <a:rPr sz="1000">
+                <a:solidFill>
+                  <a:srgbClr val="8A939B"/>
+                </a:solidFill>
+              </a:rPr>
+              <a:t>  ·  3</a:t>
+            </a:r>
           </a:p>
         </p:txBody>
       </p:sp>
@@ -14599,6 +14073,10 @@
             <a:prstDash val="solid"/>
           </a:ln>
         </p:spPr>
+        <p:txBody>
+          <a:bodyPr/>
+          <a:p/>
+        </p:txBody>
       </p:sp>
       <p:sp>
         <p:nvSpPr>
@@ -14680,79 +14158,44 @@
       </p:sp>
       <p:sp>
         <p:nvSpPr>
-          <p:cNvPr id="7" name="Text 5"/>
-          <p:cNvSpPr txBox="1"/>
-          <p:nvPr/>
-        </p:nvSpPr>
-        <p:spPr>
-          <a:xfrm>
-            <a:off x="640080" y="6446520"/>
-            <a:ext cx="8686800" cy="292608"/>
-          </a:xfrm>
-          <a:prstGeom prst="rect">
-            <a:avLst/>
-          </a:prstGeom>
-          <a:noFill/>
-          <a:ln/>
-        </p:spPr>
-        <p:txBody>
-          <a:bodyPr wrap="square" lIns="0" tIns="0" rIns="0" bIns="0" rtlCol="0" anchor="ctr"/>
-          <a:lstStyle/>
-          <a:p>
-            <a:pPr algn="l" indent="0" marL="0">
-              <a:buNone/>
-            </a:pPr>
-            <a:r>
-              <a:rPr lang="en-US" sz="900" dirty="0">
-                <a:solidFill>
-                  <a:srgbClr val="5D5D72"/>
-                </a:solidFill>
-                <a:latin typeface="Calibri" pitchFamily="34" charset="0"/>
-                <a:ea typeface="Calibri" pitchFamily="34" charset="-122"/>
-                <a:cs typeface="Calibri" pitchFamily="34" charset="-120"/>
-              </a:rPr>
-              <a:t>Usman Akram  •  COMSATS University Islamabad</a:t>
-            </a:r>
-            <a:endParaRPr lang="en-US" sz="900" dirty="0"/>
-          </a:p>
-        </p:txBody>
-      </p:sp>
-      <p:sp>
-        <p:nvSpPr>
-          <p:cNvPr id="8" name="Text 6"/>
-          <p:cNvSpPr txBox="1"/>
-          <p:nvPr/>
-        </p:nvSpPr>
-        <p:spPr>
-          <a:xfrm>
-            <a:off x="11155680" y="6446520"/>
-            <a:ext cx="457200" cy="292608"/>
-          </a:xfrm>
-          <a:prstGeom prst="rect">
-            <a:avLst/>
-          </a:prstGeom>
-          <a:noFill/>
-          <a:ln/>
-        </p:spPr>
-        <p:txBody>
-          <a:bodyPr wrap="square" lIns="0" tIns="0" rIns="0" bIns="0" rtlCol="0" anchor="ctr"/>
-          <a:lstStyle/>
-          <a:p>
-            <a:pPr algn="r" indent="0" marL="0">
-              <a:buNone/>
-            </a:pPr>
-            <a:r>
-              <a:rPr lang="en-US" sz="900" dirty="0">
-                <a:solidFill>
-                  <a:srgbClr val="5D5D72"/>
-                </a:solidFill>
-                <a:latin typeface="Calibri" pitchFamily="34" charset="0"/>
-                <a:ea typeface="Calibri" pitchFamily="34" charset="-122"/>
-                <a:cs typeface="Calibri" pitchFamily="34" charset="-120"/>
-              </a:rPr>
-              <a:t>4</a:t>
-            </a:r>
-            <a:endParaRPr lang="en-US" sz="900" dirty="0"/>
+          <p:cNvPr id="9" name="cuinotes-footer-mark"/>
+          <p:cNvSpPr txBox="1"/>
+          <p:nvPr/>
+        </p:nvSpPr>
+        <p:spPr>
+          <a:xfrm>
+            <a:off x="9951720" y="6455664"/>
+            <a:ext cx="2011680" cy="292608"/>
+          </a:xfrm>
+          <a:prstGeom prst="rect">
+            <a:avLst/>
+          </a:prstGeom>
+          <a:noFill/>
+        </p:spPr>
+        <p:txBody>
+          <a:bodyPr wrap="none" lIns="0" rIns="0" tIns="0" bIns="0">
+            <a:spAutoFit/>
+          </a:bodyPr>
+          <a:lstStyle/>
+          <a:p>
+            <a:pPr algn="r"/>
+            <a:r>
+              <a:rPr sz="1000">
+                <a:solidFill>
+                  <a:srgbClr val="8A939B"/>
+                </a:solidFill>
+                <a:hlinkClick r:id="rId3"/>
+              </a:rPr>
+              <a:t>cuinotes.com</a:t>
+            </a:r>
+            <a:r>
+              <a:rPr sz="1000">
+                <a:solidFill>
+                  <a:srgbClr val="8A939B"/>
+                </a:solidFill>
+              </a:rPr>
+              <a:t>  ·  4</a:t>
+            </a:r>
           </a:p>
         </p:txBody>
       </p:sp>
@@ -14885,6 +14328,10 @@
           </a:solidFill>
           <a:ln/>
         </p:spPr>
+        <p:txBody>
+          <a:bodyPr/>
+          <a:p/>
+        </p:txBody>
       </p:sp>
       <p:sp>
         <p:nvSpPr>
@@ -14983,6 +14430,10 @@
           </a:solidFill>
           <a:ln/>
         </p:spPr>
+        <p:txBody>
+          <a:bodyPr/>
+          <a:p/>
+        </p:txBody>
       </p:sp>
       <p:sp>
         <p:nvSpPr>
@@ -15081,6 +14532,10 @@
           </a:solidFill>
           <a:ln/>
         </p:spPr>
+        <p:txBody>
+          <a:bodyPr/>
+          <a:p/>
+        </p:txBody>
       </p:sp>
       <p:sp>
         <p:nvSpPr>
@@ -15162,79 +14617,44 @@
       </p:sp>
       <p:sp>
         <p:nvSpPr>
-          <p:cNvPr id="13" name="Text 11"/>
-          <p:cNvSpPr txBox="1"/>
-          <p:nvPr/>
-        </p:nvSpPr>
-        <p:spPr>
-          <a:xfrm>
-            <a:off x="640080" y="6446520"/>
-            <a:ext cx="8686800" cy="292608"/>
-          </a:xfrm>
-          <a:prstGeom prst="rect">
-            <a:avLst/>
-          </a:prstGeom>
-          <a:noFill/>
-          <a:ln/>
-        </p:spPr>
-        <p:txBody>
-          <a:bodyPr wrap="square" lIns="0" tIns="0" rIns="0" bIns="0" rtlCol="0" anchor="ctr"/>
-          <a:lstStyle/>
-          <a:p>
-            <a:pPr algn="l" indent="0" marL="0">
-              <a:buNone/>
-            </a:pPr>
-            <a:r>
-              <a:rPr lang="en-US" sz="900" dirty="0">
-                <a:solidFill>
-                  <a:srgbClr val="5D5D72"/>
-                </a:solidFill>
-                <a:latin typeface="Calibri" pitchFamily="34" charset="0"/>
-                <a:ea typeface="Calibri" pitchFamily="34" charset="-122"/>
-                <a:cs typeface="Calibri" pitchFamily="34" charset="-120"/>
-              </a:rPr>
-              <a:t>Usman Akram  •  COMSATS University Islamabad</a:t>
-            </a:r>
-            <a:endParaRPr lang="en-US" sz="900" dirty="0"/>
-          </a:p>
-        </p:txBody>
-      </p:sp>
-      <p:sp>
-        <p:nvSpPr>
-          <p:cNvPr id="14" name="Text 12"/>
-          <p:cNvSpPr txBox="1"/>
-          <p:nvPr/>
-        </p:nvSpPr>
-        <p:spPr>
-          <a:xfrm>
-            <a:off x="11155680" y="6446520"/>
-            <a:ext cx="457200" cy="292608"/>
-          </a:xfrm>
-          <a:prstGeom prst="rect">
-            <a:avLst/>
-          </a:prstGeom>
-          <a:noFill/>
-          <a:ln/>
-        </p:spPr>
-        <p:txBody>
-          <a:bodyPr wrap="square" lIns="0" tIns="0" rIns="0" bIns="0" rtlCol="0" anchor="ctr"/>
-          <a:lstStyle/>
-          <a:p>
-            <a:pPr algn="r" indent="0" marL="0">
-              <a:buNone/>
-            </a:pPr>
-            <a:r>
-              <a:rPr lang="en-US" sz="900" dirty="0">
-                <a:solidFill>
-                  <a:srgbClr val="5D5D72"/>
-                </a:solidFill>
-                <a:latin typeface="Calibri" pitchFamily="34" charset="0"/>
-                <a:ea typeface="Calibri" pitchFamily="34" charset="-122"/>
-                <a:cs typeface="Calibri" pitchFamily="34" charset="-120"/>
-              </a:rPr>
-              <a:t>5</a:t>
-            </a:r>
-            <a:endParaRPr lang="en-US" sz="900" dirty="0"/>
+          <p:cNvPr id="15" name="cuinotes-footer-mark"/>
+          <p:cNvSpPr txBox="1"/>
+          <p:nvPr/>
+        </p:nvSpPr>
+        <p:spPr>
+          <a:xfrm>
+            <a:off x="9951720" y="6455664"/>
+            <a:ext cx="2011680" cy="292608"/>
+          </a:xfrm>
+          <a:prstGeom prst="rect">
+            <a:avLst/>
+          </a:prstGeom>
+          <a:noFill/>
+        </p:spPr>
+        <p:txBody>
+          <a:bodyPr wrap="none" lIns="0" rIns="0" tIns="0" bIns="0">
+            <a:spAutoFit/>
+          </a:bodyPr>
+          <a:lstStyle/>
+          <a:p>
+            <a:pPr algn="r"/>
+            <a:r>
+              <a:rPr sz="1000">
+                <a:solidFill>
+                  <a:srgbClr val="8A939B"/>
+                </a:solidFill>
+                <a:hlinkClick r:id="rId3"/>
+              </a:rPr>
+              <a:t>cuinotes.com</a:t>
+            </a:r>
+            <a:r>
+              <a:rPr sz="1000">
+                <a:solidFill>
+                  <a:srgbClr val="8A939B"/>
+                </a:solidFill>
+              </a:rPr>
+              <a:t>  ·  5</a:t>
+            </a:r>
           </a:p>
         </p:txBody>
       </p:sp>
@@ -15369,6 +14789,10 @@
           </a:solidFill>
           <a:ln/>
         </p:spPr>
+        <p:txBody>
+          <a:bodyPr/>
+          <a:p/>
+        </p:txBody>
       </p:sp>
       <p:sp>
         <p:nvSpPr>
@@ -15585,6 +15009,10 @@
             </a:outerShdw>
           </a:effectLst>
         </p:spPr>
+        <p:txBody>
+          <a:bodyPr/>
+          <a:p/>
+        </p:txBody>
       </p:sp>
       <p:pic>
         <p:nvPicPr>
@@ -15612,79 +15040,44 @@
       </p:pic>
       <p:sp>
         <p:nvSpPr>
-          <p:cNvPr id="8" name="Text 5"/>
-          <p:cNvSpPr txBox="1"/>
-          <p:nvPr/>
-        </p:nvSpPr>
-        <p:spPr>
-          <a:xfrm>
-            <a:off x="640080" y="6446520"/>
-            <a:ext cx="8686800" cy="292608"/>
-          </a:xfrm>
-          <a:prstGeom prst="rect">
-            <a:avLst/>
-          </a:prstGeom>
-          <a:noFill/>
-          <a:ln/>
-        </p:spPr>
-        <p:txBody>
-          <a:bodyPr wrap="square" lIns="0" tIns="0" rIns="0" bIns="0" rtlCol="0" anchor="ctr"/>
-          <a:lstStyle/>
-          <a:p>
-            <a:pPr algn="l" indent="0" marL="0">
-              <a:buNone/>
-            </a:pPr>
-            <a:r>
-              <a:rPr lang="en-US" sz="900" dirty="0">
-                <a:solidFill>
-                  <a:srgbClr val="5D5D72"/>
-                </a:solidFill>
-                <a:latin typeface="Calibri" pitchFamily="34" charset="0"/>
-                <a:ea typeface="Calibri" pitchFamily="34" charset="-122"/>
-                <a:cs typeface="Calibri" pitchFamily="34" charset="-120"/>
-              </a:rPr>
-              <a:t>Usman Akram  •  COMSATS University Islamabad</a:t>
-            </a:r>
-            <a:endParaRPr lang="en-US" sz="900" dirty="0"/>
-          </a:p>
-        </p:txBody>
-      </p:sp>
-      <p:sp>
-        <p:nvSpPr>
-          <p:cNvPr id="9" name="Text 6"/>
-          <p:cNvSpPr txBox="1"/>
-          <p:nvPr/>
-        </p:nvSpPr>
-        <p:spPr>
-          <a:xfrm>
-            <a:off x="11155680" y="6446520"/>
-            <a:ext cx="457200" cy="292608"/>
-          </a:xfrm>
-          <a:prstGeom prst="rect">
-            <a:avLst/>
-          </a:prstGeom>
-          <a:noFill/>
-          <a:ln/>
-        </p:spPr>
-        <p:txBody>
-          <a:bodyPr wrap="square" lIns="0" tIns="0" rIns="0" bIns="0" rtlCol="0" anchor="ctr"/>
-          <a:lstStyle/>
-          <a:p>
-            <a:pPr algn="r" indent="0" marL="0">
-              <a:buNone/>
-            </a:pPr>
-            <a:r>
-              <a:rPr lang="en-US" sz="900" dirty="0">
-                <a:solidFill>
-                  <a:srgbClr val="5D5D72"/>
-                </a:solidFill>
-                <a:latin typeface="Calibri" pitchFamily="34" charset="0"/>
-                <a:ea typeface="Calibri" pitchFamily="34" charset="-122"/>
-                <a:cs typeface="Calibri" pitchFamily="34" charset="-120"/>
-              </a:rPr>
-              <a:t>6</a:t>
-            </a:r>
-            <a:endParaRPr lang="en-US" sz="900" dirty="0"/>
+          <p:cNvPr id="10" name="cuinotes-footer-mark"/>
+          <p:cNvSpPr txBox="1"/>
+          <p:nvPr/>
+        </p:nvSpPr>
+        <p:spPr>
+          <a:xfrm>
+            <a:off x="9951720" y="6455664"/>
+            <a:ext cx="2011680" cy="292608"/>
+          </a:xfrm>
+          <a:prstGeom prst="rect">
+            <a:avLst/>
+          </a:prstGeom>
+          <a:noFill/>
+        </p:spPr>
+        <p:txBody>
+          <a:bodyPr wrap="none" lIns="0" rIns="0" tIns="0" bIns="0">
+            <a:spAutoFit/>
+          </a:bodyPr>
+          <a:lstStyle/>
+          <a:p>
+            <a:pPr algn="r"/>
+            <a:r>
+              <a:rPr sz="1000">
+                <a:solidFill>
+                  <a:srgbClr val="8A939B"/>
+                </a:solidFill>
+                <a:hlinkClick r:id="rId4"/>
+              </a:rPr>
+              <a:t>cuinotes.com</a:t>
+            </a:r>
+            <a:r>
+              <a:rPr sz="1000">
+                <a:solidFill>
+                  <a:srgbClr val="8A939B"/>
+                </a:solidFill>
+              </a:rPr>
+              <a:t>  ·  6</a:t>
+            </a:r>
           </a:p>
         </p:txBody>
       </p:sp>
@@ -15819,6 +15212,10 @@
           </a:solidFill>
           <a:ln/>
         </p:spPr>
+        <p:txBody>
+          <a:bodyPr/>
+          <a:p/>
+        </p:txBody>
       </p:sp>
       <p:sp>
         <p:nvSpPr>
@@ -16035,6 +15432,10 @@
             </a:outerShdw>
           </a:effectLst>
         </p:spPr>
+        <p:txBody>
+          <a:bodyPr/>
+          <a:p/>
+        </p:txBody>
       </p:sp>
       <p:pic>
         <p:nvPicPr>
@@ -16062,79 +15463,44 @@
       </p:pic>
       <p:sp>
         <p:nvSpPr>
-          <p:cNvPr id="8" name="Text 5"/>
-          <p:cNvSpPr txBox="1"/>
-          <p:nvPr/>
-        </p:nvSpPr>
-        <p:spPr>
-          <a:xfrm>
-            <a:off x="640080" y="6446520"/>
-            <a:ext cx="8686800" cy="292608"/>
-          </a:xfrm>
-          <a:prstGeom prst="rect">
-            <a:avLst/>
-          </a:prstGeom>
-          <a:noFill/>
-          <a:ln/>
-        </p:spPr>
-        <p:txBody>
-          <a:bodyPr wrap="square" lIns="0" tIns="0" rIns="0" bIns="0" rtlCol="0" anchor="ctr"/>
-          <a:lstStyle/>
-          <a:p>
-            <a:pPr algn="l" indent="0" marL="0">
-              <a:buNone/>
-            </a:pPr>
-            <a:r>
-              <a:rPr lang="en-US" sz="900" dirty="0">
-                <a:solidFill>
-                  <a:srgbClr val="5D5D72"/>
-                </a:solidFill>
-                <a:latin typeface="Calibri" pitchFamily="34" charset="0"/>
-                <a:ea typeface="Calibri" pitchFamily="34" charset="-122"/>
-                <a:cs typeface="Calibri" pitchFamily="34" charset="-120"/>
-              </a:rPr>
-              <a:t>Usman Akram  •  COMSATS University Islamabad</a:t>
-            </a:r>
-            <a:endParaRPr lang="en-US" sz="900" dirty="0"/>
-          </a:p>
-        </p:txBody>
-      </p:sp>
-      <p:sp>
-        <p:nvSpPr>
-          <p:cNvPr id="9" name="Text 6"/>
-          <p:cNvSpPr txBox="1"/>
-          <p:nvPr/>
-        </p:nvSpPr>
-        <p:spPr>
-          <a:xfrm>
-            <a:off x="11155680" y="6446520"/>
-            <a:ext cx="457200" cy="292608"/>
-          </a:xfrm>
-          <a:prstGeom prst="rect">
-            <a:avLst/>
-          </a:prstGeom>
-          <a:noFill/>
-          <a:ln/>
-        </p:spPr>
-        <p:txBody>
-          <a:bodyPr wrap="square" lIns="0" tIns="0" rIns="0" bIns="0" rtlCol="0" anchor="ctr"/>
-          <a:lstStyle/>
-          <a:p>
-            <a:pPr algn="r" indent="0" marL="0">
-              <a:buNone/>
-            </a:pPr>
-            <a:r>
-              <a:rPr lang="en-US" sz="900" dirty="0">
-                <a:solidFill>
-                  <a:srgbClr val="5D5D72"/>
-                </a:solidFill>
-                <a:latin typeface="Calibri" pitchFamily="34" charset="0"/>
-                <a:ea typeface="Calibri" pitchFamily="34" charset="-122"/>
-                <a:cs typeface="Calibri" pitchFamily="34" charset="-120"/>
-              </a:rPr>
-              <a:t>7</a:t>
-            </a:r>
-            <a:endParaRPr lang="en-US" sz="900" dirty="0"/>
+          <p:cNvPr id="10" name="cuinotes-footer-mark"/>
+          <p:cNvSpPr txBox="1"/>
+          <p:nvPr/>
+        </p:nvSpPr>
+        <p:spPr>
+          <a:xfrm>
+            <a:off x="9951720" y="6455664"/>
+            <a:ext cx="2011680" cy="292608"/>
+          </a:xfrm>
+          <a:prstGeom prst="rect">
+            <a:avLst/>
+          </a:prstGeom>
+          <a:noFill/>
+        </p:spPr>
+        <p:txBody>
+          <a:bodyPr wrap="none" lIns="0" rIns="0" tIns="0" bIns="0">
+            <a:spAutoFit/>
+          </a:bodyPr>
+          <a:lstStyle/>
+          <a:p>
+            <a:pPr algn="r"/>
+            <a:r>
+              <a:rPr sz="1000">
+                <a:solidFill>
+                  <a:srgbClr val="8A939B"/>
+                </a:solidFill>
+                <a:hlinkClick r:id="rId4"/>
+              </a:rPr>
+              <a:t>cuinotes.com</a:t>
+            </a:r>
+            <a:r>
+              <a:rPr sz="1000">
+                <a:solidFill>
+                  <a:srgbClr val="8A939B"/>
+                </a:solidFill>
+              </a:rPr>
+              <a:t>  ·  7</a:t>
+            </a:r>
           </a:p>
         </p:txBody>
       </p:sp>
@@ -16267,6 +15633,10 @@
           </a:solidFill>
           <a:ln/>
         </p:spPr>
+        <p:txBody>
+          <a:bodyPr/>
+          <a:p/>
+        </p:txBody>
       </p:sp>
       <p:sp>
         <p:nvSpPr>
@@ -16365,6 +15735,10 @@
           </a:solidFill>
           <a:ln/>
         </p:spPr>
+        <p:txBody>
+          <a:bodyPr/>
+          <a:p/>
+        </p:txBody>
       </p:sp>
       <p:sp>
         <p:nvSpPr>
@@ -16463,6 +15837,10 @@
           </a:solidFill>
           <a:ln/>
         </p:spPr>
+        <p:txBody>
+          <a:bodyPr/>
+          <a:p/>
+        </p:txBody>
       </p:sp>
       <p:sp>
         <p:nvSpPr>
@@ -16561,6 +15939,10 @@
           </a:solidFill>
           <a:ln/>
         </p:spPr>
+        <p:txBody>
+          <a:bodyPr/>
+          <a:p/>
+        </p:txBody>
       </p:sp>
       <p:sp>
         <p:nvSpPr>
@@ -16642,79 +16024,44 @@
       </p:sp>
       <p:sp>
         <p:nvSpPr>
-          <p:cNvPr id="16" name="Text 14"/>
-          <p:cNvSpPr txBox="1"/>
-          <p:nvPr/>
-        </p:nvSpPr>
-        <p:spPr>
-          <a:xfrm>
-            <a:off x="640080" y="6446520"/>
-            <a:ext cx="8686800" cy="292608"/>
-          </a:xfrm>
-          <a:prstGeom prst="rect">
-            <a:avLst/>
-          </a:prstGeom>
-          <a:noFill/>
-          <a:ln/>
-        </p:spPr>
-        <p:txBody>
-          <a:bodyPr wrap="square" lIns="0" tIns="0" rIns="0" bIns="0" rtlCol="0" anchor="ctr"/>
-          <a:lstStyle/>
-          <a:p>
-            <a:pPr algn="l" indent="0" marL="0">
-              <a:buNone/>
-            </a:pPr>
-            <a:r>
-              <a:rPr lang="en-US" sz="900" dirty="0">
-                <a:solidFill>
-                  <a:srgbClr val="5D5D72"/>
-                </a:solidFill>
-                <a:latin typeface="Calibri" pitchFamily="34" charset="0"/>
-                <a:ea typeface="Calibri" pitchFamily="34" charset="-122"/>
-                <a:cs typeface="Calibri" pitchFamily="34" charset="-120"/>
-              </a:rPr>
-              <a:t>Usman Akram  •  COMSATS University Islamabad</a:t>
-            </a:r>
-            <a:endParaRPr lang="en-US" sz="900" dirty="0"/>
-          </a:p>
-        </p:txBody>
-      </p:sp>
-      <p:sp>
-        <p:nvSpPr>
-          <p:cNvPr id="17" name="Text 15"/>
-          <p:cNvSpPr txBox="1"/>
-          <p:nvPr/>
-        </p:nvSpPr>
-        <p:spPr>
-          <a:xfrm>
-            <a:off x="11155680" y="6446520"/>
-            <a:ext cx="457200" cy="292608"/>
-          </a:xfrm>
-          <a:prstGeom prst="rect">
-            <a:avLst/>
-          </a:prstGeom>
-          <a:noFill/>
-          <a:ln/>
-        </p:spPr>
-        <p:txBody>
-          <a:bodyPr wrap="square" lIns="0" tIns="0" rIns="0" bIns="0" rtlCol="0" anchor="ctr"/>
-          <a:lstStyle/>
-          <a:p>
-            <a:pPr algn="r" indent="0" marL="0">
-              <a:buNone/>
-            </a:pPr>
-            <a:r>
-              <a:rPr lang="en-US" sz="900" dirty="0">
-                <a:solidFill>
-                  <a:srgbClr val="5D5D72"/>
-                </a:solidFill>
-                <a:latin typeface="Calibri" pitchFamily="34" charset="0"/>
-                <a:ea typeface="Calibri" pitchFamily="34" charset="-122"/>
-                <a:cs typeface="Calibri" pitchFamily="34" charset="-120"/>
-              </a:rPr>
-              <a:t>8</a:t>
-            </a:r>
-            <a:endParaRPr lang="en-US" sz="900" dirty="0"/>
+          <p:cNvPr id="18" name="cuinotes-footer-mark"/>
+          <p:cNvSpPr txBox="1"/>
+          <p:nvPr/>
+        </p:nvSpPr>
+        <p:spPr>
+          <a:xfrm>
+            <a:off x="9951720" y="6455664"/>
+            <a:ext cx="2011680" cy="292608"/>
+          </a:xfrm>
+          <a:prstGeom prst="rect">
+            <a:avLst/>
+          </a:prstGeom>
+          <a:noFill/>
+        </p:spPr>
+        <p:txBody>
+          <a:bodyPr wrap="none" lIns="0" rIns="0" tIns="0" bIns="0">
+            <a:spAutoFit/>
+          </a:bodyPr>
+          <a:lstStyle/>
+          <a:p>
+            <a:pPr algn="r"/>
+            <a:r>
+              <a:rPr sz="1000">
+                <a:solidFill>
+                  <a:srgbClr val="8A939B"/>
+                </a:solidFill>
+                <a:hlinkClick r:id="rId3"/>
+              </a:rPr>
+              <a:t>cuinotes.com</a:t>
+            </a:r>
+            <a:r>
+              <a:rPr sz="1000">
+                <a:solidFill>
+                  <a:srgbClr val="8A939B"/>
+                </a:solidFill>
+              </a:rPr>
+              <a:t>  ·  8</a:t>
+            </a:r>
           </a:p>
         </p:txBody>
       </p:sp>
@@ -16847,6 +16194,10 @@
           </a:solidFill>
           <a:ln/>
         </p:spPr>
+        <p:txBody>
+          <a:bodyPr/>
+          <a:p/>
+        </p:txBody>
       </p:sp>
       <p:sp>
         <p:nvSpPr>
@@ -16945,6 +16296,10 @@
           </a:solidFill>
           <a:ln/>
         </p:spPr>
+        <p:txBody>
+          <a:bodyPr/>
+          <a:p/>
+        </p:txBody>
       </p:sp>
       <p:sp>
         <p:nvSpPr>
@@ -17043,6 +16398,10 @@
           </a:solidFill>
           <a:ln/>
         </p:spPr>
+        <p:txBody>
+          <a:bodyPr/>
+          <a:p/>
+        </p:txBody>
       </p:sp>
       <p:sp>
         <p:nvSpPr>
@@ -17141,6 +16500,10 @@
           </a:solidFill>
           <a:ln/>
         </p:spPr>
+        <p:txBody>
+          <a:bodyPr/>
+          <a:p/>
+        </p:txBody>
       </p:sp>
       <p:sp>
         <p:nvSpPr>
@@ -17222,79 +16585,44 @@
       </p:sp>
       <p:sp>
         <p:nvSpPr>
-          <p:cNvPr id="16" name="Text 14"/>
-          <p:cNvSpPr txBox="1"/>
-          <p:nvPr/>
-        </p:nvSpPr>
-        <p:spPr>
-          <a:xfrm>
-            <a:off x="640080" y="6446520"/>
-            <a:ext cx="8686800" cy="292608"/>
-          </a:xfrm>
-          <a:prstGeom prst="rect">
-            <a:avLst/>
-          </a:prstGeom>
-          <a:noFill/>
-          <a:ln/>
-        </p:spPr>
-        <p:txBody>
-          <a:bodyPr wrap="square" lIns="0" tIns="0" rIns="0" bIns="0" rtlCol="0" anchor="ctr"/>
-          <a:lstStyle/>
-          <a:p>
-            <a:pPr algn="l" indent="0" marL="0">
-              <a:buNone/>
-            </a:pPr>
-            <a:r>
-              <a:rPr lang="en-US" sz="900" dirty="0">
-                <a:solidFill>
-                  <a:srgbClr val="5D5D72"/>
-                </a:solidFill>
-                <a:latin typeface="Calibri" pitchFamily="34" charset="0"/>
-                <a:ea typeface="Calibri" pitchFamily="34" charset="-122"/>
-                <a:cs typeface="Calibri" pitchFamily="34" charset="-120"/>
-              </a:rPr>
-              <a:t>Usman Akram  •  COMSATS University Islamabad</a:t>
-            </a:r>
-            <a:endParaRPr lang="en-US" sz="900" dirty="0"/>
-          </a:p>
-        </p:txBody>
-      </p:sp>
-      <p:sp>
-        <p:nvSpPr>
-          <p:cNvPr id="17" name="Text 15"/>
-          <p:cNvSpPr txBox="1"/>
-          <p:nvPr/>
-        </p:nvSpPr>
-        <p:spPr>
-          <a:xfrm>
-            <a:off x="11155680" y="6446520"/>
-            <a:ext cx="457200" cy="292608"/>
-          </a:xfrm>
-          <a:prstGeom prst="rect">
-            <a:avLst/>
-          </a:prstGeom>
-          <a:noFill/>
-          <a:ln/>
-        </p:spPr>
-        <p:txBody>
-          <a:bodyPr wrap="square" lIns="0" tIns="0" rIns="0" bIns="0" rtlCol="0" anchor="ctr"/>
-          <a:lstStyle/>
-          <a:p>
-            <a:pPr algn="r" indent="0" marL="0">
-              <a:buNone/>
-            </a:pPr>
-            <a:r>
-              <a:rPr lang="en-US" sz="900" dirty="0">
-                <a:solidFill>
-                  <a:srgbClr val="5D5D72"/>
-                </a:solidFill>
-                <a:latin typeface="Calibri" pitchFamily="34" charset="0"/>
-                <a:ea typeface="Calibri" pitchFamily="34" charset="-122"/>
-                <a:cs typeface="Calibri" pitchFamily="34" charset="-120"/>
-              </a:rPr>
-              <a:t>9</a:t>
-            </a:r>
-            <a:endParaRPr lang="en-US" sz="900" dirty="0"/>
+          <p:cNvPr id="18" name="cuinotes-footer-mark"/>
+          <p:cNvSpPr txBox="1"/>
+          <p:nvPr/>
+        </p:nvSpPr>
+        <p:spPr>
+          <a:xfrm>
+            <a:off x="9951720" y="6455664"/>
+            <a:ext cx="2011680" cy="292608"/>
+          </a:xfrm>
+          <a:prstGeom prst="rect">
+            <a:avLst/>
+          </a:prstGeom>
+          <a:noFill/>
+        </p:spPr>
+        <p:txBody>
+          <a:bodyPr wrap="none" lIns="0" rIns="0" tIns="0" bIns="0">
+            <a:spAutoFit/>
+          </a:bodyPr>
+          <a:lstStyle/>
+          <a:p>
+            <a:pPr algn="r"/>
+            <a:r>
+              <a:rPr sz="1000">
+                <a:solidFill>
+                  <a:srgbClr val="8A939B"/>
+                </a:solidFill>
+                <a:hlinkClick r:id="rId3"/>
+              </a:rPr>
+              <a:t>cuinotes.com</a:t>
+            </a:r>
+            <a:r>
+              <a:rPr sz="1000">
+                <a:solidFill>
+                  <a:srgbClr val="8A939B"/>
+                </a:solidFill>
+              </a:rPr>
+              <a:t>  ·  9</a:t>
+            </a:r>
           </a:p>
         </p:txBody>
       </p:sp>

--- a/slides/CSC336-Lecture-26-Introduction-to-React.pptx
+++ b/slides/CSC336-Lecture-26-Introduction-to-React.pptx
@@ -4504,7 +4504,7 @@
         <p:spPr>
           <a:xfrm>
             <a:off x="640080" y="1965960"/>
-            <a:ext cx="10911535" cy="1554480"/>
+            <a:ext cx="10911535" cy="3657600"/>
           </a:xfrm>
           <a:prstGeom prst="roundRect">
             <a:avLst>
@@ -4535,7 +4535,7 @@
         <p:spPr>
           <a:xfrm>
             <a:off x="868680" y="2103120"/>
-            <a:ext cx="10454335" cy="274320"/>
+            <a:ext cx="10454335" cy="400000"/>
           </a:xfrm>
           <a:prstGeom prst="rect">
             <a:avLst/>
@@ -4551,7 +4551,7 @@
               <a:buNone/>
             </a:pPr>
             <a:r>
-              <a:rPr lang="en-US" sz="1000" b="1" spc="200" kern="0" dirty="0">
+              <a:rPr lang="en-US" sz="1800" b="1" spc="200" kern="0" dirty="0">
                 <a:solidFill>
                   <a:srgbClr val="1F7A46"/>
                 </a:solidFill>
@@ -4561,7 +4561,7 @@
               </a:rPr>
               <a:t>TIP</a:t>
             </a:r>
-            <a:endParaRPr lang="en-US" sz="1000" dirty="0"/>
+            <a:endParaRPr lang="en-US" sz="1800" dirty="0"/>
           </a:p>
         </p:txBody>
       </p:sp>
@@ -4573,24 +4573,24 @@
         </p:nvSpPr>
         <p:spPr>
           <a:xfrm>
-            <a:off x="868680" y="2404872"/>
-            <a:ext cx="10454335" cy="960120"/>
-          </a:xfrm>
-          <a:prstGeom prst="rect">
-            <a:avLst/>
-          </a:prstGeom>
-          <a:noFill/>
-          <a:ln/>
-        </p:spPr>
-        <p:txBody>
-          <a:bodyPr wrap="square" lIns="0" tIns="0" rIns="0" bIns="0" rtlCol="0" anchor="t"/>
+            <a:off x="868680" y="2795960"/>
+            <a:ext cx="10454335" cy="2500000"/>
+          </a:xfrm>
+          <a:prstGeom prst="rect">
+            <a:avLst/>
+          </a:prstGeom>
+          <a:noFill/>
+          <a:ln/>
+        </p:spPr>
+        <p:txBody>
+          <a:bodyPr wrap="square" lIns="0" tIns="0" rIns="0" bIns="0" rtlCol="0" anchor="ctr"/>
           <a:lstStyle/>
           <a:p>
             <a:pPr indent="0" marL="0">
               <a:buNone/>
             </a:pPr>
             <a:r>
-              <a:rPr lang="en-US" sz="1250" dirty="0">
+              <a:rPr lang="en-US" sz="2800" dirty="0">
                 <a:solidFill>
                   <a:srgbClr val="26262F"/>
                 </a:solidFill>
@@ -4600,7 +4600,7 @@
               </a:rPr>
               <a:t>As a React developer, you almost never interact with the Virtual DOM yourself. You write components that describe the UI for the current data, and reconciliation handles the rest.</a:t>
             </a:r>
-            <a:endParaRPr lang="en-US" sz="1250" dirty="0"/>
+            <a:endParaRPr lang="en-US" sz="2800" dirty="0"/>
           </a:p>
         </p:txBody>
       </p:sp>
@@ -5233,9 +5233,13 @@
             </a:avLst>
           </a:prstGeom>
           <a:solidFill>
-            <a:srgbClr val="1E1E4C"/>
+            <a:srgbClr val="F7F8F9"/>
           </a:solidFill>
-          <a:ln/>
+          <a:ln w="9525">
+            <a:solidFill>
+              <a:srgbClr val="D0D5DD"/>
+            </a:solidFill>
+          </a:ln>
         </p:spPr>
         <p:txBody>
           <a:bodyPr/>
@@ -5272,7 +5276,7 @@
             <a:r>
               <a:rPr lang="en-US" sz="1400" dirty="0">
                 <a:solidFill>
-                  <a:srgbClr val="C9D3F5"/>
+                  <a:srgbClr val="1F2429"/>
                 </a:solidFill>
                 <a:latin typeface="Courier New" pitchFamily="34" charset="0"/>
                 <a:ea typeface="Courier New" pitchFamily="34" charset="-122"/>
@@ -5292,7 +5296,7 @@
             <a:r>
               <a:rPr lang="en-US" sz="1400" dirty="0">
                 <a:solidFill>
-                  <a:srgbClr val="C9D3F5"/>
+                  <a:srgbClr val="1F2429"/>
                 </a:solidFill>
                 <a:latin typeface="Courier New" pitchFamily="34" charset="0"/>
                 <a:ea typeface="Courier New" pitchFamily="34" charset="-122"/>
@@ -5312,7 +5316,7 @@
             <a:r>
               <a:rPr lang="en-US" sz="1400" dirty="0">
                 <a:solidFill>
-                  <a:srgbClr val="C9D3F5"/>
+                  <a:srgbClr val="1F2429"/>
                 </a:solidFill>
                 <a:latin typeface="Courier New" pitchFamily="34" charset="0"/>
                 <a:ea typeface="Courier New" pitchFamily="34" charset="-122"/>
@@ -5332,7 +5336,7 @@
             <a:r>
               <a:rPr lang="en-US" sz="1400" dirty="0">
                 <a:solidFill>
-                  <a:srgbClr val="C9D3F5"/>
+                  <a:srgbClr val="1F2429"/>
                 </a:solidFill>
                 <a:latin typeface="Courier New" pitchFamily="34" charset="0"/>
                 <a:ea typeface="Courier New" pitchFamily="34" charset="-122"/>
@@ -5553,9 +5557,13 @@
             </a:avLst>
           </a:prstGeom>
           <a:solidFill>
-            <a:srgbClr val="1E1E4C"/>
+            <a:srgbClr val="F7F8F9"/>
           </a:solidFill>
-          <a:ln/>
+          <a:ln w="9525">
+            <a:solidFill>
+              <a:srgbClr val="D0D5DD"/>
+            </a:solidFill>
+          </a:ln>
         </p:spPr>
         <p:txBody>
           <a:bodyPr/>
@@ -5592,7 +5600,7 @@
             <a:r>
               <a:rPr lang="en-US" sz="1400" dirty="0">
                 <a:solidFill>
-                  <a:srgbClr val="C9D3F5"/>
+                  <a:srgbClr val="1F2429"/>
                 </a:solidFill>
                 <a:latin typeface="Courier New" pitchFamily="34" charset="0"/>
                 <a:ea typeface="Courier New" pitchFamily="34" charset="-122"/>
@@ -5612,7 +5620,7 @@
             <a:r>
               <a:rPr lang="en-US" sz="1400" dirty="0">
                 <a:solidFill>
-                  <a:srgbClr val="C9D3F5"/>
+                  <a:srgbClr val="1F2429"/>
                 </a:solidFill>
                 <a:latin typeface="Courier New" pitchFamily="34" charset="0"/>
                 <a:ea typeface="Courier New" pitchFamily="34" charset="-122"/>
@@ -5632,7 +5640,7 @@
             <a:r>
               <a:rPr lang="en-US" sz="1400" dirty="0">
                 <a:solidFill>
-                  <a:srgbClr val="C9D3F5"/>
+                  <a:srgbClr val="1F2429"/>
                 </a:solidFill>
                 <a:latin typeface="Courier New" pitchFamily="34" charset="0"/>
                 <a:ea typeface="Courier New" pitchFamily="34" charset="-122"/>
@@ -5652,7 +5660,7 @@
             <a:r>
               <a:rPr lang="en-US" sz="1400" dirty="0">
                 <a:solidFill>
-                  <a:srgbClr val="C9D3F5"/>
+                  <a:srgbClr val="1F2429"/>
                 </a:solidFill>
                 <a:latin typeface="Courier New" pitchFamily="34" charset="0"/>
                 <a:ea typeface="Courier New" pitchFamily="34" charset="-122"/>
@@ -5672,7 +5680,7 @@
             <a:r>
               <a:rPr lang="en-US" sz="1400" dirty="0">
                 <a:solidFill>
-                  <a:srgbClr val="C9D3F5"/>
+                  <a:srgbClr val="1F2429"/>
                 </a:solidFill>
                 <a:latin typeface="Courier New" pitchFamily="34" charset="0"/>
                 <a:ea typeface="Courier New" pitchFamily="34" charset="-122"/>
@@ -5692,7 +5700,7 @@
             <a:r>
               <a:rPr lang="en-US" sz="1400" dirty="0">
                 <a:solidFill>
-                  <a:srgbClr val="C9D3F5"/>
+                  <a:srgbClr val="1F2429"/>
                 </a:solidFill>
                 <a:latin typeface="Courier New" pitchFamily="34" charset="0"/>
                 <a:ea typeface="Courier New" pitchFamily="34" charset="-122"/>
@@ -5712,7 +5720,7 @@
             <a:r>
               <a:rPr lang="en-US" sz="1400" dirty="0">
                 <a:solidFill>
-                  <a:srgbClr val="C9D3F5"/>
+                  <a:srgbClr val="1F2429"/>
                 </a:solidFill>
                 <a:latin typeface="Courier New" pitchFamily="34" charset="0"/>
                 <a:ea typeface="Courier New" pitchFamily="34" charset="-122"/>
@@ -5732,7 +5740,7 @@
             <a:r>
               <a:rPr lang="en-US" sz="1400" dirty="0">
                 <a:solidFill>
-                  <a:srgbClr val="C9D3F5"/>
+                  <a:srgbClr val="1F2429"/>
                 </a:solidFill>
                 <a:latin typeface="Courier New" pitchFamily="34" charset="0"/>
                 <a:ea typeface="Courier New" pitchFamily="34" charset="-122"/>
@@ -5752,7 +5760,7 @@
             <a:r>
               <a:rPr lang="en-US" sz="1400" dirty="0">
                 <a:solidFill>
-                  <a:srgbClr val="C9D3F5"/>
+                  <a:srgbClr val="1F2429"/>
                 </a:solidFill>
                 <a:latin typeface="Courier New" pitchFamily="34" charset="0"/>
                 <a:ea typeface="Courier New" pitchFamily="34" charset="-122"/>
@@ -5772,7 +5780,7 @@
             <a:r>
               <a:rPr lang="en-US" sz="1400" dirty="0">
                 <a:solidFill>
-                  <a:srgbClr val="C9D3F5"/>
+                  <a:srgbClr val="1F2429"/>
                 </a:solidFill>
                 <a:latin typeface="Courier New" pitchFamily="34" charset="0"/>
                 <a:ea typeface="Courier New" pitchFamily="34" charset="-122"/>
@@ -5954,9 +5962,13 @@
             </a:avLst>
           </a:prstGeom>
           <a:solidFill>
-            <a:srgbClr val="1E1E4C"/>
+            <a:srgbClr val="F7F8F9"/>
           </a:solidFill>
-          <a:ln/>
+          <a:ln w="9525">
+            <a:solidFill>
+              <a:srgbClr val="D0D5DD"/>
+            </a:solidFill>
+          </a:ln>
         </p:spPr>
         <p:txBody>
           <a:bodyPr/>
@@ -5993,7 +6005,7 @@
             <a:r>
               <a:rPr lang="en-US" sz="1400" dirty="0">
                 <a:solidFill>
-                  <a:srgbClr val="C9D3F5"/>
+                  <a:srgbClr val="1F2429"/>
                 </a:solidFill>
                 <a:latin typeface="Courier New" pitchFamily="34" charset="0"/>
                 <a:ea typeface="Courier New" pitchFamily="34" charset="-122"/>
@@ -6013,7 +6025,7 @@
             <a:r>
               <a:rPr lang="en-US" sz="1400" dirty="0">
                 <a:solidFill>
-                  <a:srgbClr val="C9D3F5"/>
+                  <a:srgbClr val="1F2429"/>
                 </a:solidFill>
                 <a:latin typeface="Courier New" pitchFamily="34" charset="0"/>
                 <a:ea typeface="Courier New" pitchFamily="34" charset="-122"/>
@@ -6033,7 +6045,7 @@
             <a:r>
               <a:rPr lang="en-US" sz="1400" dirty="0">
                 <a:solidFill>
-                  <a:srgbClr val="C9D3F5"/>
+                  <a:srgbClr val="1F2429"/>
                 </a:solidFill>
                 <a:latin typeface="Courier New" pitchFamily="34" charset="0"/>
                 <a:ea typeface="Courier New" pitchFamily="34" charset="-122"/>
@@ -6062,7 +6074,7 @@
             <a:r>
               <a:rPr lang="en-US" sz="1400" dirty="0">
                 <a:solidFill>
-                  <a:srgbClr val="C9D3F5"/>
+                  <a:srgbClr val="1F2429"/>
                 </a:solidFill>
                 <a:latin typeface="Courier New" pitchFamily="34" charset="0"/>
                 <a:ea typeface="Courier New" pitchFamily="34" charset="-122"/>
@@ -6082,7 +6094,7 @@
             <a:r>
               <a:rPr lang="en-US" sz="1400" dirty="0">
                 <a:solidFill>
-                  <a:srgbClr val="C9D3F5"/>
+                  <a:srgbClr val="1F2429"/>
                 </a:solidFill>
                 <a:latin typeface="Courier New" pitchFamily="34" charset="0"/>
                 <a:ea typeface="Courier New" pitchFamily="34" charset="-122"/>
@@ -6102,7 +6114,7 @@
             <a:r>
               <a:rPr lang="en-US" sz="1400" dirty="0">
                 <a:solidFill>
-                  <a:srgbClr val="C9D3F5"/>
+                  <a:srgbClr val="1F2429"/>
                 </a:solidFill>
                 <a:latin typeface="Courier New" pitchFamily="34" charset="0"/>
                 <a:ea typeface="Courier New" pitchFamily="34" charset="-122"/>
@@ -6122,7 +6134,7 @@
             <a:r>
               <a:rPr lang="en-US" sz="1400" dirty="0">
                 <a:solidFill>
-                  <a:srgbClr val="C9D3F5"/>
+                  <a:srgbClr val="1F2429"/>
                 </a:solidFill>
                 <a:latin typeface="Courier New" pitchFamily="34" charset="0"/>
                 <a:ea typeface="Courier New" pitchFamily="34" charset="-122"/>
@@ -6142,7 +6154,7 @@
             <a:r>
               <a:rPr lang="en-US" sz="1400" dirty="0">
                 <a:solidFill>
-                  <a:srgbClr val="C9D3F5"/>
+                  <a:srgbClr val="1F2429"/>
                 </a:solidFill>
                 <a:latin typeface="Courier New" pitchFamily="34" charset="0"/>
                 <a:ea typeface="Courier New" pitchFamily="34" charset="-122"/>
@@ -6822,9 +6834,13 @@
             </a:avLst>
           </a:prstGeom>
           <a:solidFill>
-            <a:srgbClr val="1E1E4C"/>
+            <a:srgbClr val="F7F8F9"/>
           </a:solidFill>
-          <a:ln/>
+          <a:ln w="9525">
+            <a:solidFill>
+              <a:srgbClr val="D0D5DD"/>
+            </a:solidFill>
+          </a:ln>
         </p:spPr>
         <p:txBody>
           <a:bodyPr/>
@@ -6861,7 +6877,7 @@
             <a:r>
               <a:rPr lang="en-US" sz="1400" dirty="0">
                 <a:solidFill>
-                  <a:srgbClr val="C9D3F5"/>
+                  <a:srgbClr val="1F2429"/>
                 </a:solidFill>
                 <a:latin typeface="Courier New" pitchFamily="34" charset="0"/>
                 <a:ea typeface="Courier New" pitchFamily="34" charset="-122"/>
@@ -6890,7 +6906,7 @@
             <a:r>
               <a:rPr lang="en-US" sz="1400" dirty="0">
                 <a:solidFill>
-                  <a:srgbClr val="C9D3F5"/>
+                  <a:srgbClr val="1F2429"/>
                 </a:solidFill>
                 <a:latin typeface="Courier New" pitchFamily="34" charset="0"/>
                 <a:ea typeface="Courier New" pitchFamily="34" charset="-122"/>
@@ -6910,7 +6926,7 @@
             <a:r>
               <a:rPr lang="en-US" sz="1400" dirty="0">
                 <a:solidFill>
-                  <a:srgbClr val="C9D3F5"/>
+                  <a:srgbClr val="1F2429"/>
                 </a:solidFill>
                 <a:latin typeface="Courier New" pitchFamily="34" charset="0"/>
                 <a:ea typeface="Courier New" pitchFamily="34" charset="-122"/>
@@ -7092,9 +7108,13 @@
             </a:avLst>
           </a:prstGeom>
           <a:solidFill>
-            <a:srgbClr val="1E1E4C"/>
+            <a:srgbClr val="F7F8F9"/>
           </a:solidFill>
-          <a:ln/>
+          <a:ln w="9525">
+            <a:solidFill>
+              <a:srgbClr val="D0D5DD"/>
+            </a:solidFill>
+          </a:ln>
         </p:spPr>
         <p:txBody>
           <a:bodyPr/>
@@ -7131,7 +7151,7 @@
             <a:r>
               <a:rPr lang="en-US" sz="1300" dirty="0">
                 <a:solidFill>
-                  <a:srgbClr val="C9D3F5"/>
+                  <a:srgbClr val="1F2429"/>
                 </a:solidFill>
                 <a:latin typeface="Courier New" pitchFamily="34" charset="0"/>
                 <a:ea typeface="Courier New" pitchFamily="34" charset="-122"/>
@@ -7151,7 +7171,7 @@
             <a:r>
               <a:rPr lang="en-US" sz="1300" dirty="0">
                 <a:solidFill>
-                  <a:srgbClr val="C9D3F5"/>
+                  <a:srgbClr val="1F2429"/>
                 </a:solidFill>
                 <a:latin typeface="Courier New" pitchFamily="34" charset="0"/>
                 <a:ea typeface="Courier New" pitchFamily="34" charset="-122"/>
@@ -7171,7 +7191,7 @@
             <a:r>
               <a:rPr lang="en-US" sz="1300" dirty="0">
                 <a:solidFill>
-                  <a:srgbClr val="C9D3F5"/>
+                  <a:srgbClr val="1F2429"/>
                 </a:solidFill>
                 <a:latin typeface="Courier New" pitchFamily="34" charset="0"/>
                 <a:ea typeface="Courier New" pitchFamily="34" charset="-122"/>
@@ -7191,7 +7211,7 @@
             <a:r>
               <a:rPr lang="en-US" sz="1300" dirty="0">
                 <a:solidFill>
-                  <a:srgbClr val="C9D3F5"/>
+                  <a:srgbClr val="1F2429"/>
                 </a:solidFill>
                 <a:latin typeface="Courier New" pitchFamily="34" charset="0"/>
                 <a:ea typeface="Courier New" pitchFamily="34" charset="-122"/>
@@ -7211,7 +7231,7 @@
             <a:r>
               <a:rPr lang="en-US" sz="1300" dirty="0">
                 <a:solidFill>
-                  <a:srgbClr val="C9D3F5"/>
+                  <a:srgbClr val="1F2429"/>
                 </a:solidFill>
                 <a:latin typeface="Courier New" pitchFamily="34" charset="0"/>
                 <a:ea typeface="Courier New" pitchFamily="34" charset="-122"/>
@@ -7231,7 +7251,7 @@
             <a:r>
               <a:rPr lang="en-US" sz="1300" dirty="0">
                 <a:solidFill>
-                  <a:srgbClr val="C9D3F5"/>
+                  <a:srgbClr val="1F2429"/>
                 </a:solidFill>
                 <a:latin typeface="Courier New" pitchFamily="34" charset="0"/>
                 <a:ea typeface="Courier New" pitchFamily="34" charset="-122"/>
@@ -7251,7 +7271,7 @@
             <a:r>
               <a:rPr lang="en-US" sz="1300" dirty="0">
                 <a:solidFill>
-                  <a:srgbClr val="C9D3F5"/>
+                  <a:srgbClr val="1F2429"/>
                 </a:solidFill>
                 <a:latin typeface="Courier New" pitchFamily="34" charset="0"/>
                 <a:ea typeface="Courier New" pitchFamily="34" charset="-122"/>
@@ -7271,7 +7291,7 @@
             <a:r>
               <a:rPr lang="en-US" sz="1300" dirty="0">
                 <a:solidFill>
-                  <a:srgbClr val="C9D3F5"/>
+                  <a:srgbClr val="1F2429"/>
                 </a:solidFill>
                 <a:latin typeface="Courier New" pitchFamily="34" charset="0"/>
                 <a:ea typeface="Courier New" pitchFamily="34" charset="-122"/>
@@ -7291,7 +7311,7 @@
             <a:r>
               <a:rPr lang="en-US" sz="1300" dirty="0">
                 <a:solidFill>
-                  <a:srgbClr val="C9D3F5"/>
+                  <a:srgbClr val="1F2429"/>
                 </a:solidFill>
                 <a:latin typeface="Courier New" pitchFamily="34" charset="0"/>
                 <a:ea typeface="Courier New" pitchFamily="34" charset="-122"/>
@@ -7311,7 +7331,7 @@
             <a:r>
               <a:rPr lang="en-US" sz="1300" dirty="0">
                 <a:solidFill>
-                  <a:srgbClr val="C9D3F5"/>
+                  <a:srgbClr val="1F2429"/>
                 </a:solidFill>
                 <a:latin typeface="Courier New" pitchFamily="34" charset="0"/>
                 <a:ea typeface="Courier New" pitchFamily="34" charset="-122"/>
@@ -7331,7 +7351,7 @@
             <a:r>
               <a:rPr lang="en-US" sz="1300" dirty="0">
                 <a:solidFill>
-                  <a:srgbClr val="C9D3F5"/>
+                  <a:srgbClr val="1F2429"/>
                 </a:solidFill>
                 <a:latin typeface="Courier New" pitchFamily="34" charset="0"/>
                 <a:ea typeface="Courier New" pitchFamily="34" charset="-122"/>
@@ -7567,7 +7587,7 @@
         <p:spPr>
           <a:xfrm>
             <a:off x="640080" y="1965960"/>
-            <a:ext cx="10911535" cy="1920240"/>
+            <a:ext cx="10911535" cy="3657600"/>
           </a:xfrm>
           <a:prstGeom prst="roundRect">
             <a:avLst>
@@ -7598,7 +7618,7 @@
         <p:spPr>
           <a:xfrm>
             <a:off x="868680" y="2103120"/>
-            <a:ext cx="10454335" cy="274320"/>
+            <a:ext cx="10454335" cy="400000"/>
           </a:xfrm>
           <a:prstGeom prst="rect">
             <a:avLst/>
@@ -7614,7 +7634,7 @@
               <a:buNone/>
             </a:pPr>
             <a:r>
-              <a:rPr lang="en-US" sz="1000" b="1" spc="200" kern="0" dirty="0">
+              <a:rPr lang="en-US" sz="1800" b="1" spc="200" kern="0" dirty="0">
                 <a:solidFill>
                   <a:srgbClr val="8A3A12"/>
                 </a:solidFill>
@@ -7624,7 +7644,7 @@
               </a:rPr>
               <a:t>WARNING</a:t>
             </a:r>
-            <a:endParaRPr lang="en-US" sz="1000" dirty="0"/>
+            <a:endParaRPr lang="en-US" sz="1800" dirty="0"/>
           </a:p>
         </p:txBody>
       </p:sp>
@@ -7636,24 +7656,24 @@
         </p:nvSpPr>
         <p:spPr>
           <a:xfrm>
-            <a:off x="868680" y="2404872"/>
-            <a:ext cx="10454335" cy="1325880"/>
-          </a:xfrm>
-          <a:prstGeom prst="rect">
-            <a:avLst/>
-          </a:prstGeom>
-          <a:noFill/>
-          <a:ln/>
-        </p:spPr>
-        <p:txBody>
-          <a:bodyPr wrap="square" lIns="0" tIns="0" rIns="0" bIns="0" rtlCol="0" anchor="t"/>
+            <a:off x="868680" y="2795960"/>
+            <a:ext cx="10454335" cy="2500000"/>
+          </a:xfrm>
+          <a:prstGeom prst="rect">
+            <a:avLst/>
+          </a:prstGeom>
+          <a:noFill/>
+          <a:ln/>
+        </p:spPr>
+        <p:txBody>
+          <a:bodyPr wrap="square" lIns="0" tIns="0" rIns="0" bIns="0" rtlCol="0" anchor="ctr"/>
           <a:lstStyle/>
           <a:p>
             <a:pPr indent="0" marL="0">
               <a:buNone/>
             </a:pPr>
             <a:r>
-              <a:rPr lang="en-US" sz="1250" dirty="0">
+              <a:rPr lang="en-US" sz="2800" dirty="0">
                 <a:solidFill>
                   <a:srgbClr val="26262F"/>
                 </a:solidFill>
@@ -7663,7 +7683,7 @@
               </a:rPr>
               <a:t>A component must return a single root element (or a Fragment). Use className instead of class. Every tag must be closed, including self-closing tags like &lt;img /&gt;. Curly braces { } can only hold expressions, not statements like if or for.</a:t>
             </a:r>
-            <a:endParaRPr lang="en-US" sz="1250" dirty="0"/>
+            <a:endParaRPr lang="en-US" sz="2800" dirty="0"/>
           </a:p>
         </p:txBody>
       </p:sp>
@@ -8500,9 +8520,13 @@
             </a:avLst>
           </a:prstGeom>
           <a:solidFill>
-            <a:srgbClr val="1E1E4C"/>
+            <a:srgbClr val="F7F8F9"/>
           </a:solidFill>
-          <a:ln/>
+          <a:ln w="9525">
+            <a:solidFill>
+              <a:srgbClr val="D0D5DD"/>
+            </a:solidFill>
+          </a:ln>
         </p:spPr>
         <p:txBody>
           <a:bodyPr/>
@@ -8539,7 +8563,7 @@
             <a:r>
               <a:rPr lang="en-US" sz="1108" dirty="0">
                 <a:solidFill>
-                  <a:srgbClr val="C9D3F5"/>
+                  <a:srgbClr val="1F2429"/>
                 </a:solidFill>
                 <a:latin typeface="Courier New" pitchFamily="34" charset="0"/>
                 <a:ea typeface="Courier New" pitchFamily="34" charset="-122"/>
@@ -8559,7 +8583,7 @@
             <a:r>
               <a:rPr lang="en-US" sz="1108" dirty="0">
                 <a:solidFill>
-                  <a:srgbClr val="C9D3F5"/>
+                  <a:srgbClr val="1F2429"/>
                 </a:solidFill>
                 <a:latin typeface="Courier New" pitchFamily="34" charset="0"/>
                 <a:ea typeface="Courier New" pitchFamily="34" charset="-122"/>
@@ -8579,7 +8603,7 @@
             <a:r>
               <a:rPr lang="en-US" sz="1108" dirty="0">
                 <a:solidFill>
-                  <a:srgbClr val="C9D3F5"/>
+                  <a:srgbClr val="1F2429"/>
                 </a:solidFill>
                 <a:latin typeface="Courier New" pitchFamily="34" charset="0"/>
                 <a:ea typeface="Courier New" pitchFamily="34" charset="-122"/>
@@ -8599,7 +8623,7 @@
             <a:r>
               <a:rPr lang="en-US" sz="1108" dirty="0">
                 <a:solidFill>
-                  <a:srgbClr val="C9D3F5"/>
+                  <a:srgbClr val="1F2429"/>
                 </a:solidFill>
                 <a:latin typeface="Courier New" pitchFamily="34" charset="0"/>
                 <a:ea typeface="Courier New" pitchFamily="34" charset="-122"/>
@@ -8628,7 +8652,7 @@
             <a:r>
               <a:rPr lang="en-US" sz="1108" dirty="0">
                 <a:solidFill>
-                  <a:srgbClr val="C9D3F5"/>
+                  <a:srgbClr val="1F2429"/>
                 </a:solidFill>
                 <a:latin typeface="Courier New" pitchFamily="34" charset="0"/>
                 <a:ea typeface="Courier New" pitchFamily="34" charset="-122"/>
@@ -8648,7 +8672,7 @@
             <a:r>
               <a:rPr lang="en-US" sz="1108" dirty="0">
                 <a:solidFill>
-                  <a:srgbClr val="C9D3F5"/>
+                  <a:srgbClr val="1F2429"/>
                 </a:solidFill>
                 <a:latin typeface="Courier New" pitchFamily="34" charset="0"/>
                 <a:ea typeface="Courier New" pitchFamily="34" charset="-122"/>
@@ -8668,7 +8692,7 @@
             <a:r>
               <a:rPr lang="en-US" sz="1108" dirty="0">
                 <a:solidFill>
-                  <a:srgbClr val="C9D3F5"/>
+                  <a:srgbClr val="1F2429"/>
                 </a:solidFill>
                 <a:latin typeface="Courier New" pitchFamily="34" charset="0"/>
                 <a:ea typeface="Courier New" pitchFamily="34" charset="-122"/>
@@ -8688,7 +8712,7 @@
             <a:r>
               <a:rPr lang="en-US" sz="1108" dirty="0">
                 <a:solidFill>
-                  <a:srgbClr val="C9D3F5"/>
+                  <a:srgbClr val="1F2429"/>
                 </a:solidFill>
                 <a:latin typeface="Courier New" pitchFamily="34" charset="0"/>
                 <a:ea typeface="Courier New" pitchFamily="34" charset="-122"/>
@@ -8708,7 +8732,7 @@
             <a:r>
               <a:rPr lang="en-US" sz="1108" dirty="0">
                 <a:solidFill>
-                  <a:srgbClr val="C9D3F5"/>
+                  <a:srgbClr val="1F2429"/>
                 </a:solidFill>
                 <a:latin typeface="Courier New" pitchFamily="34" charset="0"/>
                 <a:ea typeface="Courier New" pitchFamily="34" charset="-122"/>
@@ -8728,7 +8752,7 @@
             <a:r>
               <a:rPr lang="en-US" sz="1108" dirty="0">
                 <a:solidFill>
-                  <a:srgbClr val="C9D3F5"/>
+                  <a:srgbClr val="1F2429"/>
                 </a:solidFill>
                 <a:latin typeface="Courier New" pitchFamily="34" charset="0"/>
                 <a:ea typeface="Courier New" pitchFamily="34" charset="-122"/>
@@ -8748,7 +8772,7 @@
             <a:r>
               <a:rPr lang="en-US" sz="1108" dirty="0">
                 <a:solidFill>
-                  <a:srgbClr val="C9D3F5"/>
+                  <a:srgbClr val="1F2429"/>
                 </a:solidFill>
                 <a:latin typeface="Courier New" pitchFamily="34" charset="0"/>
                 <a:ea typeface="Courier New" pitchFamily="34" charset="-122"/>
@@ -8768,7 +8792,7 @@
             <a:r>
               <a:rPr lang="en-US" sz="1108" dirty="0">
                 <a:solidFill>
-                  <a:srgbClr val="C9D3F5"/>
+                  <a:srgbClr val="1F2429"/>
                 </a:solidFill>
                 <a:latin typeface="Courier New" pitchFamily="34" charset="0"/>
                 <a:ea typeface="Courier New" pitchFamily="34" charset="-122"/>
@@ -9344,9 +9368,13 @@
             </a:avLst>
           </a:prstGeom>
           <a:solidFill>
-            <a:srgbClr val="1E1E4C"/>
+            <a:srgbClr val="F7F8F9"/>
           </a:solidFill>
-          <a:ln/>
+          <a:ln w="9525">
+            <a:solidFill>
+              <a:srgbClr val="D0D5DD"/>
+            </a:solidFill>
+          </a:ln>
         </p:spPr>
         <p:txBody>
           <a:bodyPr/>
@@ -9383,7 +9411,7 @@
             <a:r>
               <a:rPr lang="en-US" sz="1300" dirty="0">
                 <a:solidFill>
-                  <a:srgbClr val="C9D3F5"/>
+                  <a:srgbClr val="1F2429"/>
                 </a:solidFill>
                 <a:latin typeface="Courier New" pitchFamily="34" charset="0"/>
                 <a:ea typeface="Courier New" pitchFamily="34" charset="-122"/>
@@ -9403,7 +9431,7 @@
             <a:r>
               <a:rPr lang="en-US" sz="1300" dirty="0">
                 <a:solidFill>
-                  <a:srgbClr val="C9D3F5"/>
+                  <a:srgbClr val="1F2429"/>
                 </a:solidFill>
                 <a:latin typeface="Courier New" pitchFamily="34" charset="0"/>
                 <a:ea typeface="Courier New" pitchFamily="34" charset="-122"/>
@@ -9423,7 +9451,7 @@
             <a:r>
               <a:rPr lang="en-US" sz="1300" dirty="0">
                 <a:solidFill>
-                  <a:srgbClr val="C9D3F5"/>
+                  <a:srgbClr val="1F2429"/>
                 </a:solidFill>
                 <a:latin typeface="Courier New" pitchFamily="34" charset="0"/>
                 <a:ea typeface="Courier New" pitchFamily="34" charset="-122"/>
@@ -9443,7 +9471,7 @@
             <a:r>
               <a:rPr lang="en-US" sz="1300" dirty="0">
                 <a:solidFill>
-                  <a:srgbClr val="C9D3F5"/>
+                  <a:srgbClr val="1F2429"/>
                 </a:solidFill>
                 <a:latin typeface="Courier New" pitchFamily="34" charset="0"/>
                 <a:ea typeface="Courier New" pitchFamily="34" charset="-122"/>
@@ -9463,7 +9491,7 @@
             <a:r>
               <a:rPr lang="en-US" sz="1300" dirty="0">
                 <a:solidFill>
-                  <a:srgbClr val="C9D3F5"/>
+                  <a:srgbClr val="1F2429"/>
                 </a:solidFill>
                 <a:latin typeface="Courier New" pitchFamily="34" charset="0"/>
                 <a:ea typeface="Courier New" pitchFamily="34" charset="-122"/>
@@ -9483,7 +9511,7 @@
             <a:r>
               <a:rPr lang="en-US" sz="1300" dirty="0">
                 <a:solidFill>
-                  <a:srgbClr val="C9D3F5"/>
+                  <a:srgbClr val="1F2429"/>
                 </a:solidFill>
                 <a:latin typeface="Courier New" pitchFamily="34" charset="0"/>
                 <a:ea typeface="Courier New" pitchFamily="34" charset="-122"/>
@@ -9503,7 +9531,7 @@
             <a:r>
               <a:rPr lang="en-US" sz="1300" dirty="0">
                 <a:solidFill>
-                  <a:srgbClr val="C9D3F5"/>
+                  <a:srgbClr val="1F2429"/>
                 </a:solidFill>
                 <a:latin typeface="Courier New" pitchFamily="34" charset="0"/>
                 <a:ea typeface="Courier New" pitchFamily="34" charset="-122"/>
@@ -9523,7 +9551,7 @@
             <a:r>
               <a:rPr lang="en-US" sz="1300" dirty="0">
                 <a:solidFill>
-                  <a:srgbClr val="C9D3F5"/>
+                  <a:srgbClr val="1F2429"/>
                 </a:solidFill>
                 <a:latin typeface="Courier New" pitchFamily="34" charset="0"/>
                 <a:ea typeface="Courier New" pitchFamily="34" charset="-122"/>
@@ -9543,7 +9571,7 @@
             <a:r>
               <a:rPr lang="en-US" sz="1300" dirty="0">
                 <a:solidFill>
-                  <a:srgbClr val="C9D3F5"/>
+                  <a:srgbClr val="1F2429"/>
                 </a:solidFill>
                 <a:latin typeface="Courier New" pitchFamily="34" charset="0"/>
                 <a:ea typeface="Courier New" pitchFamily="34" charset="-122"/>
@@ -9563,7 +9591,7 @@
             <a:r>
               <a:rPr lang="en-US" sz="1300" dirty="0">
                 <a:solidFill>
-                  <a:srgbClr val="C9D3F5"/>
+                  <a:srgbClr val="1F2429"/>
                 </a:solidFill>
                 <a:latin typeface="Courier New" pitchFamily="34" charset="0"/>
                 <a:ea typeface="Courier New" pitchFamily="34" charset="-122"/>
@@ -9583,7 +9611,7 @@
             <a:r>
               <a:rPr lang="en-US" sz="1300" dirty="0">
                 <a:solidFill>
-                  <a:srgbClr val="C9D3F5"/>
+                  <a:srgbClr val="1F2429"/>
                 </a:solidFill>
                 <a:latin typeface="Courier New" pitchFamily="34" charset="0"/>
                 <a:ea typeface="Courier New" pitchFamily="34" charset="-122"/>
@@ -9819,7 +9847,7 @@
         <p:spPr>
           <a:xfrm>
             <a:off x="640080" y="1965960"/>
-            <a:ext cx="10911535" cy="1828800"/>
+            <a:ext cx="10911535" cy="3657600"/>
           </a:xfrm>
           <a:prstGeom prst="roundRect">
             <a:avLst>
@@ -9850,7 +9878,7 @@
         <p:spPr>
           <a:xfrm>
             <a:off x="868680" y="2103120"/>
-            <a:ext cx="10454335" cy="274320"/>
+            <a:ext cx="10454335" cy="400000"/>
           </a:xfrm>
           <a:prstGeom prst="rect">
             <a:avLst/>
@@ -9866,7 +9894,7 @@
               <a:buNone/>
             </a:pPr>
             <a:r>
-              <a:rPr lang="en-US" sz="1000" b="1" spc="200" kern="0" dirty="0">
+              <a:rPr lang="en-US" sz="1800" b="1" spc="200" kern="0" dirty="0">
                 <a:solidFill>
                   <a:srgbClr val="8A3A12"/>
                 </a:solidFill>
@@ -9876,7 +9904,7 @@
               </a:rPr>
               <a:t>WARNING</a:t>
             </a:r>
-            <a:endParaRPr lang="en-US" sz="1000" dirty="0"/>
+            <a:endParaRPr lang="en-US" sz="1800" dirty="0"/>
           </a:p>
         </p:txBody>
       </p:sp>
@@ -9888,24 +9916,24 @@
         </p:nvSpPr>
         <p:spPr>
           <a:xfrm>
-            <a:off x="868680" y="2404872"/>
-            <a:ext cx="10454335" cy="1234440"/>
-          </a:xfrm>
-          <a:prstGeom prst="rect">
-            <a:avLst/>
-          </a:prstGeom>
-          <a:noFill/>
-          <a:ln/>
-        </p:spPr>
-        <p:txBody>
-          <a:bodyPr wrap="square" lIns="0" tIns="0" rIns="0" bIns="0" rtlCol="0" anchor="t"/>
+            <a:off x="868680" y="2795960"/>
+            <a:ext cx="10454335" cy="2500000"/>
+          </a:xfrm>
+          <a:prstGeom prst="rect">
+            <a:avLst/>
+          </a:prstGeom>
+          <a:noFill/>
+          <a:ln/>
+        </p:spPr>
+        <p:txBody>
+          <a:bodyPr wrap="square" lIns="0" tIns="0" rIns="0" bIns="0" rtlCol="0" anchor="ctr"/>
           <a:lstStyle/>
           <a:p>
             <a:pPr indent="0" marL="0">
               <a:buNone/>
             </a:pPr>
             <a:r>
-              <a:rPr lang="en-US" sz="1250" dirty="0">
+              <a:rPr lang="en-US" sz="2800" dirty="0">
                 <a:solidFill>
                   <a:srgbClr val="26262F"/>
                 </a:solidFill>
@@ -9915,7 +9943,7 @@
               </a:rPr>
               <a:t>It's tempting to write key={index} — fine for static lists that never reorder. But if the list CAN change, using the index can mix up which DOM element belongs to which data (subtle bugs like inputs showing the wrong value). Prefer a stable, unique identifier from your data, such as a database id.</a:t>
             </a:r>
-            <a:endParaRPr lang="en-US" sz="1250" dirty="0"/>
+            <a:endParaRPr lang="en-US" sz="2800" dirty="0"/>
           </a:p>
         </p:txBody>
       </p:sp>
@@ -12468,7 +12496,7 @@
         <p:spPr>
           <a:xfrm>
             <a:off x="640080" y="1965960"/>
-            <a:ext cx="10911535" cy="1737360"/>
+            <a:ext cx="10911535" cy="3657600"/>
           </a:xfrm>
           <a:prstGeom prst="roundRect">
             <a:avLst>
@@ -12499,7 +12527,7 @@
         <p:spPr>
           <a:xfrm>
             <a:off x="868680" y="2103120"/>
-            <a:ext cx="10454335" cy="274320"/>
+            <a:ext cx="10454335" cy="400000"/>
           </a:xfrm>
           <a:prstGeom prst="rect">
             <a:avLst/>
@@ -12515,7 +12543,7 @@
               <a:buNone/>
             </a:pPr>
             <a:r>
-              <a:rPr lang="en-US" sz="1000" b="1" spc="200" kern="0" dirty="0">
+              <a:rPr lang="en-US" sz="1800" b="1" spc="200" kern="0" dirty="0">
                 <a:solidFill>
                   <a:srgbClr val="33459E"/>
                 </a:solidFill>
@@ -12525,7 +12553,7 @@
               </a:rPr>
               <a:t>NOTE</a:t>
             </a:r>
-            <a:endParaRPr lang="en-US" sz="1000" dirty="0"/>
+            <a:endParaRPr lang="en-US" sz="1800" dirty="0"/>
           </a:p>
         </p:txBody>
       </p:sp>
@@ -12537,24 +12565,24 @@
         </p:nvSpPr>
         <p:spPr>
           <a:xfrm>
-            <a:off x="868680" y="2404872"/>
-            <a:ext cx="10454335" cy="1143000"/>
-          </a:xfrm>
-          <a:prstGeom prst="rect">
-            <a:avLst/>
-          </a:prstGeom>
-          <a:noFill/>
-          <a:ln/>
-        </p:spPr>
-        <p:txBody>
-          <a:bodyPr wrap="square" lIns="0" tIns="0" rIns="0" bIns="0" rtlCol="0" anchor="t"/>
+            <a:off x="868680" y="2795960"/>
+            <a:ext cx="10454335" cy="2500000"/>
+          </a:xfrm>
+          <a:prstGeom prst="rect">
+            <a:avLst/>
+          </a:prstGeom>
+          <a:noFill/>
+          <a:ln/>
+        </p:spPr>
+        <p:txBody>
+          <a:bodyPr wrap="square" lIns="0" tIns="0" rIns="0" bIns="0" rtlCol="0" anchor="ctr"/>
           <a:lstStyle/>
           <a:p>
             <a:pPr indent="0" marL="0">
               <a:buNone/>
             </a:pPr>
             <a:r>
-              <a:rPr lang="en-US" sz="1250" dirty="0">
+              <a:rPr lang="en-US" sz="2800" dirty="0">
                 <a:solidFill>
                   <a:srgbClr val="26262F"/>
                 </a:solidFill>
@@ -12564,7 +12592,7 @@
               </a:rPr>
               <a:t>In this course you will build a client-side-rendered SPA with Vite, talking to the Express REST API from Lecture 25. SSR, SSG, and frameworks like Next.js are covered in depth in the Advanced Web Technologies course.</a:t>
             </a:r>
-            <a:endParaRPr lang="en-US" sz="1250" dirty="0"/>
+            <a:endParaRPr lang="en-US" sz="2800" dirty="0"/>
           </a:p>
         </p:txBody>
       </p:sp>
@@ -14056,7 +14084,7 @@
         <p:spPr>
           <a:xfrm>
             <a:off x="640080" y="1965960"/>
-            <a:ext cx="10911535" cy="1737360"/>
+            <a:ext cx="10911535" cy="3657600"/>
           </a:xfrm>
           <a:prstGeom prst="roundRect">
             <a:avLst>
@@ -14087,7 +14115,7 @@
         <p:spPr>
           <a:xfrm>
             <a:off x="868680" y="2103120"/>
-            <a:ext cx="10454335" cy="274320"/>
+            <a:ext cx="10454335" cy="400000"/>
           </a:xfrm>
           <a:prstGeom prst="rect">
             <a:avLst/>
@@ -14103,7 +14131,7 @@
               <a:buNone/>
             </a:pPr>
             <a:r>
-              <a:rPr lang="en-US" sz="1000" b="1" spc="200" kern="0" dirty="0">
+              <a:rPr lang="en-US" sz="1800" b="1" spc="200" kern="0" dirty="0">
                 <a:solidFill>
                   <a:srgbClr val="33459E"/>
                 </a:solidFill>
@@ -14113,7 +14141,7 @@
               </a:rPr>
               <a:t>NOTE</a:t>
             </a:r>
-            <a:endParaRPr lang="en-US" sz="1000" dirty="0"/>
+            <a:endParaRPr lang="en-US" sz="1800" dirty="0"/>
           </a:p>
         </p:txBody>
       </p:sp>
@@ -14125,24 +14153,24 @@
         </p:nvSpPr>
         <p:spPr>
           <a:xfrm>
-            <a:off x="868680" y="2404872"/>
-            <a:ext cx="10454335" cy="1143000"/>
-          </a:xfrm>
-          <a:prstGeom prst="rect">
-            <a:avLst/>
-          </a:prstGeom>
-          <a:noFill/>
-          <a:ln/>
-        </p:spPr>
-        <p:txBody>
-          <a:bodyPr wrap="square" lIns="0" tIns="0" rIns="0" bIns="0" rtlCol="0" anchor="t"/>
+            <a:off x="868680" y="2795960"/>
+            <a:ext cx="10454335" cy="2500000"/>
+          </a:xfrm>
+          <a:prstGeom prst="rect">
+            <a:avLst/>
+          </a:prstGeom>
+          <a:noFill/>
+          <a:ln/>
+        </p:spPr>
+        <p:txBody>
+          <a:bodyPr wrap="square" lIns="0" tIns="0" rIns="0" bIns="0" rtlCol="0" anchor="ctr"/>
           <a:lstStyle/>
           <a:p>
             <a:pPr indent="0" marL="0">
               <a:buNone/>
             </a:pPr>
             <a:r>
-              <a:rPr lang="en-US" sz="1250" dirty="0">
+              <a:rPr lang="en-US" sz="2800" dirty="0">
                 <a:solidFill>
                   <a:srgbClr val="26262F"/>
                 </a:solidFill>
@@ -14152,7 +14180,7 @@
               </a:rPr>
               <a:t>React only handles the "view" layer — turning data into UI. Routing and global state management are added separately, unlike a full framework like Angular that bundles everything out of the box.</a:t>
             </a:r>
-            <a:endParaRPr lang="en-US" sz="1250" dirty="0"/>
+            <a:endParaRPr lang="en-US" sz="2800" dirty="0"/>
           </a:p>
         </p:txBody>
       </p:sp>
@@ -14785,9 +14813,13 @@
             </a:avLst>
           </a:prstGeom>
           <a:solidFill>
-            <a:srgbClr val="1E1E4C"/>
+            <a:srgbClr val="F7F8F9"/>
           </a:solidFill>
-          <a:ln/>
+          <a:ln w="9525">
+            <a:solidFill>
+              <a:srgbClr val="D0D5DD"/>
+            </a:solidFill>
+          </a:ln>
         </p:spPr>
         <p:txBody>
           <a:bodyPr/>
@@ -14824,7 +14856,7 @@
             <a:r>
               <a:rPr lang="en-US" sz="1300" dirty="0">
                 <a:solidFill>
-                  <a:srgbClr val="C9D3F5"/>
+                  <a:srgbClr val="1F2429"/>
                 </a:solidFill>
                 <a:latin typeface="Courier New" pitchFamily="34" charset="0"/>
                 <a:ea typeface="Courier New" pitchFamily="34" charset="-122"/>
@@ -14844,7 +14876,7 @@
             <a:r>
               <a:rPr lang="en-US" sz="1300" dirty="0">
                 <a:solidFill>
-                  <a:srgbClr val="C9D3F5"/>
+                  <a:srgbClr val="1F2429"/>
                 </a:solidFill>
                 <a:latin typeface="Courier New" pitchFamily="34" charset="0"/>
                 <a:ea typeface="Courier New" pitchFamily="34" charset="-122"/>
@@ -14864,7 +14896,7 @@
             <a:r>
               <a:rPr lang="en-US" sz="1300" dirty="0">
                 <a:solidFill>
-                  <a:srgbClr val="C9D3F5"/>
+                  <a:srgbClr val="1F2429"/>
                 </a:solidFill>
                 <a:latin typeface="Courier New" pitchFamily="34" charset="0"/>
                 <a:ea typeface="Courier New" pitchFamily="34" charset="-122"/>
@@ -14884,7 +14916,7 @@
             <a:r>
               <a:rPr lang="en-US" sz="1300" dirty="0">
                 <a:solidFill>
-                  <a:srgbClr val="C9D3F5"/>
+                  <a:srgbClr val="1F2429"/>
                 </a:solidFill>
                 <a:latin typeface="Courier New" pitchFamily="34" charset="0"/>
                 <a:ea typeface="Courier New" pitchFamily="34" charset="-122"/>
@@ -14904,7 +14936,7 @@
             <a:r>
               <a:rPr lang="en-US" sz="1300" dirty="0">
                 <a:solidFill>
-                  <a:srgbClr val="C9D3F5"/>
+                  <a:srgbClr val="1F2429"/>
                 </a:solidFill>
                 <a:latin typeface="Courier New" pitchFamily="34" charset="0"/>
                 <a:ea typeface="Courier New" pitchFamily="34" charset="-122"/>
@@ -14924,7 +14956,7 @@
             <a:r>
               <a:rPr lang="en-US" sz="1300" dirty="0">
                 <a:solidFill>
-                  <a:srgbClr val="C9D3F5"/>
+                  <a:srgbClr val="1F2429"/>
                 </a:solidFill>
                 <a:latin typeface="Courier New" pitchFamily="34" charset="0"/>
                 <a:ea typeface="Courier New" pitchFamily="34" charset="-122"/>
@@ -14944,7 +14976,7 @@
             <a:r>
               <a:rPr lang="en-US" sz="1300" dirty="0">
                 <a:solidFill>
-                  <a:srgbClr val="C9D3F5"/>
+                  <a:srgbClr val="1F2429"/>
                 </a:solidFill>
                 <a:latin typeface="Courier New" pitchFamily="34" charset="0"/>
                 <a:ea typeface="Courier New" pitchFamily="34" charset="-122"/>
@@ -14964,7 +14996,7 @@
             <a:r>
               <a:rPr lang="en-US" sz="1300" dirty="0">
                 <a:solidFill>
-                  <a:srgbClr val="C9D3F5"/>
+                  <a:srgbClr val="1F2429"/>
                 </a:solidFill>
                 <a:latin typeface="Courier New" pitchFamily="34" charset="0"/>
                 <a:ea typeface="Courier New" pitchFamily="34" charset="-122"/>
@@ -15208,9 +15240,13 @@
             </a:avLst>
           </a:prstGeom>
           <a:solidFill>
-            <a:srgbClr val="1E1E4C"/>
+            <a:srgbClr val="F7F8F9"/>
           </a:solidFill>
-          <a:ln/>
+          <a:ln w="9525">
+            <a:solidFill>
+              <a:srgbClr val="D0D5DD"/>
+            </a:solidFill>
+          </a:ln>
         </p:spPr>
         <p:txBody>
           <a:bodyPr/>
@@ -15247,7 +15283,7 @@
             <a:r>
               <a:rPr lang="en-US" sz="1300" dirty="0">
                 <a:solidFill>
-                  <a:srgbClr val="C9D3F5"/>
+                  <a:srgbClr val="1F2429"/>
                 </a:solidFill>
                 <a:latin typeface="Courier New" pitchFamily="34" charset="0"/>
                 <a:ea typeface="Courier New" pitchFamily="34" charset="-122"/>
@@ -15267,7 +15303,7 @@
             <a:r>
               <a:rPr lang="en-US" sz="1300" dirty="0">
                 <a:solidFill>
-                  <a:srgbClr val="C9D3F5"/>
+                  <a:srgbClr val="1F2429"/>
                 </a:solidFill>
                 <a:latin typeface="Courier New" pitchFamily="34" charset="0"/>
                 <a:ea typeface="Courier New" pitchFamily="34" charset="-122"/>
@@ -15287,7 +15323,7 @@
             <a:r>
               <a:rPr lang="en-US" sz="1300" dirty="0">
                 <a:solidFill>
-                  <a:srgbClr val="C9D3F5"/>
+                  <a:srgbClr val="1F2429"/>
                 </a:solidFill>
                 <a:latin typeface="Courier New" pitchFamily="34" charset="0"/>
                 <a:ea typeface="Courier New" pitchFamily="34" charset="-122"/>
@@ -15307,7 +15343,7 @@
             <a:r>
               <a:rPr lang="en-US" sz="1300" dirty="0">
                 <a:solidFill>
-                  <a:srgbClr val="C9D3F5"/>
+                  <a:srgbClr val="1F2429"/>
                 </a:solidFill>
                 <a:latin typeface="Courier New" pitchFamily="34" charset="0"/>
                 <a:ea typeface="Courier New" pitchFamily="34" charset="-122"/>
@@ -15327,7 +15363,7 @@
             <a:r>
               <a:rPr lang="en-US" sz="1300" dirty="0">
                 <a:solidFill>
-                  <a:srgbClr val="C9D3F5"/>
+                  <a:srgbClr val="1F2429"/>
                 </a:solidFill>
                 <a:latin typeface="Courier New" pitchFamily="34" charset="0"/>
                 <a:ea typeface="Courier New" pitchFamily="34" charset="-122"/>
@@ -15347,7 +15383,7 @@
             <a:r>
               <a:rPr lang="en-US" sz="1300" dirty="0">
                 <a:solidFill>
-                  <a:srgbClr val="C9D3F5"/>
+                  <a:srgbClr val="1F2429"/>
                 </a:solidFill>
                 <a:latin typeface="Courier New" pitchFamily="34" charset="0"/>
                 <a:ea typeface="Courier New" pitchFamily="34" charset="-122"/>
@@ -15367,7 +15403,7 @@
             <a:r>
               <a:rPr lang="en-US" sz="1300" dirty="0">
                 <a:solidFill>
-                  <a:srgbClr val="C9D3F5"/>
+                  <a:srgbClr val="1F2429"/>
                 </a:solidFill>
                 <a:latin typeface="Courier New" pitchFamily="34" charset="0"/>
                 <a:ea typeface="Courier New" pitchFamily="34" charset="-122"/>
@@ -15387,7 +15423,7 @@
             <a:r>
               <a:rPr lang="en-US" sz="1300" dirty="0">
                 <a:solidFill>
-                  <a:srgbClr val="C9D3F5"/>
+                  <a:srgbClr val="1F2429"/>
                 </a:solidFill>
                 <a:latin typeface="Courier New" pitchFamily="34" charset="0"/>
                 <a:ea typeface="Courier New" pitchFamily="34" charset="-122"/>
